--- a/workshop-3/teacher-slides.pptx
+++ b/workshop-3/teacher-slides.pptx
@@ -2,27 +2,27 @@
 <file path=ppt/presentation.xml><?xml version="1.0" encoding="utf-8"?>
 <p:presentation xmlns:p="http://schemas.openxmlformats.org/presentationml/2006/main">
   <p:sldMasterIdLst>
-    <p:sldMasterId xmlns:r="http://schemas.openxmlformats.org/officeDocument/2006/relationships" id="2147483648" r:id="R5301a8e4ae464680"/>
+    <p:sldMasterId xmlns:r="http://schemas.openxmlformats.org/officeDocument/2006/relationships" id="2147483648" r:id="R8b73fe7a85bc45c9"/>
   </p:sldMasterIdLst>
   <p:notesMasterIdLst>
-    <p:notesMasterId xmlns:r="http://schemas.openxmlformats.org/officeDocument/2006/relationships" r:id="Rf55e129dc708490c"/>
+    <p:notesMasterId xmlns:r="http://schemas.openxmlformats.org/officeDocument/2006/relationships" r:id="Rf5d995ec39aa4b8a"/>
   </p:notesMasterIdLst>
   <p:sldIdLst>
-    <p:sldId xmlns:r="http://schemas.openxmlformats.org/officeDocument/2006/relationships" id="256" r:id="Ree7cb05afb3f4a17"/>
-    <p:sldId xmlns:r="http://schemas.openxmlformats.org/officeDocument/2006/relationships" id="257" r:id="R7438b42be2944a2a"/>
-    <p:sldId xmlns:r="http://schemas.openxmlformats.org/officeDocument/2006/relationships" id="258" r:id="Rcd6cb5f384744f1d"/>
-    <p:sldId xmlns:r="http://schemas.openxmlformats.org/officeDocument/2006/relationships" id="259" r:id="Rad44f21b13904d6d"/>
-    <p:sldId xmlns:r="http://schemas.openxmlformats.org/officeDocument/2006/relationships" id="260" r:id="Rd92ff10cd89c4f99"/>
-    <p:sldId xmlns:r="http://schemas.openxmlformats.org/officeDocument/2006/relationships" id="261" r:id="R6b8280ed2b8b43c4"/>
-    <p:sldId xmlns:r="http://schemas.openxmlformats.org/officeDocument/2006/relationships" id="262" r:id="R5c24b4fc9335422e"/>
-    <p:sldId xmlns:r="http://schemas.openxmlformats.org/officeDocument/2006/relationships" id="263" r:id="R81b5f014989e4e88"/>
-    <p:sldId xmlns:r="http://schemas.openxmlformats.org/officeDocument/2006/relationships" id="264" r:id="Rb5ac4cd33181423a"/>
-    <p:sldId xmlns:r="http://schemas.openxmlformats.org/officeDocument/2006/relationships" id="265" r:id="R221f8ba3ef954f8a"/>
-    <p:sldId xmlns:r="http://schemas.openxmlformats.org/officeDocument/2006/relationships" id="266" r:id="Rbcd25fe2089c400c"/>
-    <p:sldId xmlns:r="http://schemas.openxmlformats.org/officeDocument/2006/relationships" id="267" r:id="R0978b8c40dc94543"/>
-    <p:sldId xmlns:r="http://schemas.openxmlformats.org/officeDocument/2006/relationships" id="268" r:id="R686530773a094c04"/>
-    <p:sldId xmlns:r="http://schemas.openxmlformats.org/officeDocument/2006/relationships" id="269" r:id="R786a7e65248a4ff8"/>
-    <p:sldId xmlns:r="http://schemas.openxmlformats.org/officeDocument/2006/relationships" id="270" r:id="Rd5ce9875e0cd41ef"/>
+    <p:sldId xmlns:r="http://schemas.openxmlformats.org/officeDocument/2006/relationships" id="256" r:id="R260344d90b5a4e80"/>
+    <p:sldId xmlns:r="http://schemas.openxmlformats.org/officeDocument/2006/relationships" id="257" r:id="R5bda33e527d24c38"/>
+    <p:sldId xmlns:r="http://schemas.openxmlformats.org/officeDocument/2006/relationships" id="258" r:id="Ra0963a6bc4c146f9"/>
+    <p:sldId xmlns:r="http://schemas.openxmlformats.org/officeDocument/2006/relationships" id="259" r:id="R32d3ac1d5e95487b"/>
+    <p:sldId xmlns:r="http://schemas.openxmlformats.org/officeDocument/2006/relationships" id="260" r:id="R3a60ce4240f848a6"/>
+    <p:sldId xmlns:r="http://schemas.openxmlformats.org/officeDocument/2006/relationships" id="261" r:id="Rf21ec6e5baea44ac"/>
+    <p:sldId xmlns:r="http://schemas.openxmlformats.org/officeDocument/2006/relationships" id="262" r:id="R3628809e66c04e78"/>
+    <p:sldId xmlns:r="http://schemas.openxmlformats.org/officeDocument/2006/relationships" id="263" r:id="R511744e5bbc04d23"/>
+    <p:sldId xmlns:r="http://schemas.openxmlformats.org/officeDocument/2006/relationships" id="264" r:id="R0e84858b95fb43c0"/>
+    <p:sldId xmlns:r="http://schemas.openxmlformats.org/officeDocument/2006/relationships" id="265" r:id="Rf24549e0c38c4e4b"/>
+    <p:sldId xmlns:r="http://schemas.openxmlformats.org/officeDocument/2006/relationships" id="266" r:id="Re162623424e749a6"/>
+    <p:sldId xmlns:r="http://schemas.openxmlformats.org/officeDocument/2006/relationships" id="267" r:id="R5e2c5646998f4b40"/>
+    <p:sldId xmlns:r="http://schemas.openxmlformats.org/officeDocument/2006/relationships" id="268" r:id="Rba382dc9fd544ea1"/>
+    <p:sldId xmlns:r="http://schemas.openxmlformats.org/officeDocument/2006/relationships" id="269" r:id="R214aec4f69204125"/>
+    <p:sldId xmlns:r="http://schemas.openxmlformats.org/officeDocument/2006/relationships" id="270" r:id="R22100a77763f4155"/>
   </p:sldIdLst>
   <p:sldSz cx="12192000" cy="6858000"/>
   <p:notesSz cx="6858000" cy="9144000"/>
@@ -596,7 +596,7 @@
           <a:lstStyle xmlns:a="http://schemas.openxmlformats.org/drawingml/2006/main"/>
           <a:p xmlns:a="http://schemas.openxmlformats.org/drawingml/2006/main">
             <a:r>
-              <a:t>After sufficient varied samples, click Train Model and wait until it finishes before using Preview. Do not change advanced settings for this beginner workshop. UI presence verified, no claim of classroom model training or webcam tests yet.</a:t>
+              <a:t>After sufficient varied samples, click Train Model and wait until it finishes before using Preview. Do not change advanced settings for this beginner workshop. Explain that the highest-scoring class is the current prediction. If A is all correct, students may write none found; never require an invented mistake. UI presence verified, no claim of classroom model training or webcam tests yet.</a:t>
             </a:r>
           </a:p>
         </p:txBody>
@@ -806,7 +806,7 @@
           <a:lstStyle xmlns:a="http://schemas.openxmlformats.org/drawingml/2006/main"/>
           <a:p xmlns:a="http://schemas.openxmlformats.org/drawingml/2006/main">
             <a:r>
-              <a:t>Try a bottle or ruler not used in training. The model still outputs only the chosen classes; high score does not create knowledge of a missing class. Empty background is learned background examples, not universal other/unknown. This is classification, not a general detector of everything.</a:t>
+              <a:t>Try a bottle not used in training. The model still outputs only the chosen classes; high score does not create knowledge of a missing class. Empty background is learned background examples, not universal other/unknown. This is classification, not a general detector of everything.</a:t>
             </a:r>
           </a:p>
         </p:txBody>
@@ -1504,7 +1504,7 @@
   </p:cSld>
   <p:clrMap bg1="lt1" tx1="dk1" bg2="lt2" tx2="dk2" accent1="accent1" accent2="accent2" accent3="accent3" accent4="accent4" accent5="accent5" accent6="accent6" hlink="hlink" folHlink="folHlink"/>
   <p:sldLayoutIdLst>
-    <p:sldLayoutId xmlns:r="http://schemas.openxmlformats.org/officeDocument/2006/relationships" id="2147483649" r:id="R701d298beca948c0"/>
+    <p:sldLayoutId xmlns:r="http://schemas.openxmlformats.org/officeDocument/2006/relationships" id="2147483649" r:id="R59dc8dfab51a4c37"/>
   </p:sldLayoutIdLst>
   <p:txStyles>
     <p:titleStyle>
@@ -2217,7 +2217,7 @@
           <p:cNvPr id="10" name="">
             <a:extLst xmlns:a="http://schemas.openxmlformats.org/drawingml/2006/main">
               <a:ext uri="{FF2B5EF4-FFF2-40B4-BE49-F238E27FC236}">
-                <a16:creationId xmlns:a16="http://schemas.microsoft.com/office/drawing/2014/main" id="{5F2254E2-D3D9-432A-85F7-715C25A22EB5}"/>
+                <a16:creationId xmlns:a16="http://schemas.microsoft.com/office/drawing/2014/main" id="{4DD911F6-B506-4682-90DB-D50319EC926A}"/>
               </a:ext>
             </a:extLst>
           </p:cNvPr>
@@ -2274,7 +2274,7 @@
           <p:cNvPr id="2" name="">
             <a:extLst xmlns:a="http://schemas.openxmlformats.org/drawingml/2006/main">
               <a:ext uri="{FF2B5EF4-FFF2-40B4-BE49-F238E27FC236}">
-                <a16:creationId xmlns:a16="http://schemas.microsoft.com/office/drawing/2014/main" id="{9D34D975-9041-4EE0-B34F-357160B9B9A8}"/>
+                <a16:creationId xmlns:a16="http://schemas.microsoft.com/office/drawing/2014/main" id="{63E1454D-AFBA-4C87-836A-75762EE725E7}"/>
               </a:ext>
             </a:extLst>
           </p:cNvPr>
@@ -2331,7 +2331,7 @@
           <p:cNvPr id="3" name="">
             <a:extLst xmlns:a="http://schemas.openxmlformats.org/drawingml/2006/main">
               <a:ext uri="{FF2B5EF4-FFF2-40B4-BE49-F238E27FC236}">
-                <a16:creationId xmlns:a16="http://schemas.microsoft.com/office/drawing/2014/main" id="{12CE16AD-1E35-4BCD-BB74-C234C7E6416A}"/>
+                <a16:creationId xmlns:a16="http://schemas.microsoft.com/office/drawing/2014/main" id="{ABA1F9A9-F8FE-435D-ACD9-A06B3D566551}"/>
               </a:ext>
             </a:extLst>
           </p:cNvPr>
@@ -2388,7 +2388,7 @@
           <p:cNvPr id="4" name="">
             <a:extLst xmlns:a="http://schemas.openxmlformats.org/drawingml/2006/main">
               <a:ext uri="{FF2B5EF4-FFF2-40B4-BE49-F238E27FC236}">
-                <a16:creationId xmlns:a16="http://schemas.microsoft.com/office/drawing/2014/main" id="{D688AC4A-90ED-4C3E-BA76-D13B7302E540}"/>
+                <a16:creationId xmlns:a16="http://schemas.microsoft.com/office/drawing/2014/main" id="{9C24C25E-AE85-44DB-9B0C-DA6343342C72}"/>
               </a:ext>
             </a:extLst>
           </p:cNvPr>
@@ -2445,7 +2445,7 @@
           <p:cNvPr id="5" name="">
             <a:extLst xmlns:a="http://schemas.openxmlformats.org/drawingml/2006/main">
               <a:ext uri="{FF2B5EF4-FFF2-40B4-BE49-F238E27FC236}">
-                <a16:creationId xmlns:a16="http://schemas.microsoft.com/office/drawing/2014/main" id="{60910C80-4E7C-462A-A2A9-42DBBEF0DD78}"/>
+                <a16:creationId xmlns:a16="http://schemas.microsoft.com/office/drawing/2014/main" id="{04FF21CA-96DE-46E2-BAEB-E0E46F0E24E7}"/>
               </a:ext>
             </a:extLst>
           </p:cNvPr>
@@ -2502,7 +2502,7 @@
           <p:cNvPr id="6" name="">
             <a:extLst xmlns:a="http://schemas.openxmlformats.org/drawingml/2006/main">
               <a:ext uri="{FF2B5EF4-FFF2-40B4-BE49-F238E27FC236}">
-                <a16:creationId xmlns:a16="http://schemas.microsoft.com/office/drawing/2014/main" id="{49A36C9C-A608-40CB-8C57-FAE88739DA00}"/>
+                <a16:creationId xmlns:a16="http://schemas.microsoft.com/office/drawing/2014/main" id="{B2C084AC-411C-4BE1-87E9-742C8728C54B}"/>
               </a:ext>
             </a:extLst>
           </p:cNvPr>
@@ -2559,7 +2559,7 @@
           <p:cNvPr id="7" name="">
             <a:extLst xmlns:a="http://schemas.openxmlformats.org/drawingml/2006/main">
               <a:ext uri="{FF2B5EF4-FFF2-40B4-BE49-F238E27FC236}">
-                <a16:creationId xmlns:a16="http://schemas.microsoft.com/office/drawing/2014/main" id="{75C35996-4B52-4429-B3C7-11165FE5399B}"/>
+                <a16:creationId xmlns:a16="http://schemas.microsoft.com/office/drawing/2014/main" id="{9E667DE1-BA7E-4C32-A843-7E16004472C7}"/>
               </a:ext>
             </a:extLst>
           </p:cNvPr>
@@ -2616,7 +2616,7 @@
           <p:cNvPr id="8" name="">
             <a:extLst xmlns:a="http://schemas.openxmlformats.org/drawingml/2006/main">
               <a:ext uri="{FF2B5EF4-FFF2-40B4-BE49-F238E27FC236}">
-                <a16:creationId xmlns:a16="http://schemas.microsoft.com/office/drawing/2014/main" id="{A064804A-04AF-4DFF-A306-34A974C97476}"/>
+                <a16:creationId xmlns:a16="http://schemas.microsoft.com/office/drawing/2014/main" id="{B418FA84-80C7-42F2-A1FE-E38482F3ABBC}"/>
               </a:ext>
             </a:extLst>
           </p:cNvPr>
@@ -2673,7 +2673,7 @@
           <p:cNvPr id="9" name="">
             <a:extLst xmlns:a="http://schemas.openxmlformats.org/drawingml/2006/main">
               <a:ext uri="{FF2B5EF4-FFF2-40B4-BE49-F238E27FC236}">
-                <a16:creationId xmlns:a16="http://schemas.microsoft.com/office/drawing/2014/main" id="{B3E1D612-643D-453A-9229-43AD5D67A1A5}"/>
+                <a16:creationId xmlns:a16="http://schemas.microsoft.com/office/drawing/2014/main" id="{37495521-8A61-4999-9FE6-543BB09CE918}"/>
               </a:ext>
             </a:extLst>
           </p:cNvPr>
@@ -2728,7 +2728,7 @@
     </p:spTree>
     <p:extLst>
       <p:ext uri="{BB962C8B-B14F-4D97-AF65-F5344CB8AC3E}">
-        <p14:creationId xmlns:p14="http://schemas.microsoft.com/office/powerpoint/2010/main" val="571881509"/>
+        <p14:creationId xmlns:p14="http://schemas.microsoft.com/office/powerpoint/2010/main" val="704412897"/>
       </p:ext>
     </p:extLst>
   </p:cSld>
@@ -2759,7 +2759,7 @@
           <p:cNvPr id="10" name="">
             <a:extLst xmlns:a="http://schemas.openxmlformats.org/drawingml/2006/main">
               <a:ext uri="{FF2B5EF4-FFF2-40B4-BE49-F238E27FC236}">
-                <a16:creationId xmlns:a16="http://schemas.microsoft.com/office/drawing/2014/main" id="{031C1CB4-CCB1-4D9B-8A6A-7C0515B07CEF}"/>
+                <a16:creationId xmlns:a16="http://schemas.microsoft.com/office/drawing/2014/main" id="{003DDF80-D137-4410-AAB5-5E97FB33CC81}"/>
               </a:ext>
             </a:extLst>
           </p:cNvPr>
@@ -2816,7 +2816,7 @@
           <p:cNvPr id="2" name="">
             <a:extLst xmlns:a="http://schemas.openxmlformats.org/drawingml/2006/main">
               <a:ext uri="{FF2B5EF4-FFF2-40B4-BE49-F238E27FC236}">
-                <a16:creationId xmlns:a16="http://schemas.microsoft.com/office/drawing/2014/main" id="{BE364EAB-E505-422E-B5F5-7A6960084C46}"/>
+                <a16:creationId xmlns:a16="http://schemas.microsoft.com/office/drawing/2014/main" id="{AC2E90A1-1CC4-4C47-8CBF-E58817674F53}"/>
               </a:ext>
             </a:extLst>
           </p:cNvPr>
@@ -2873,7 +2873,7 @@
           <p:cNvPr id="3" name="">
             <a:extLst xmlns:a="http://schemas.openxmlformats.org/drawingml/2006/main">
               <a:ext uri="{FF2B5EF4-FFF2-40B4-BE49-F238E27FC236}">
-                <a16:creationId xmlns:a16="http://schemas.microsoft.com/office/drawing/2014/main" id="{CC7923A1-B668-49EE-A766-38D566415CFC}"/>
+                <a16:creationId xmlns:a16="http://schemas.microsoft.com/office/drawing/2014/main" id="{67E36ED8-5A6B-4319-B805-250087DEAC8F}"/>
               </a:ext>
             </a:extLst>
           </p:cNvPr>
@@ -2930,7 +2930,7 @@
           <p:cNvPr id="4" name="">
             <a:extLst xmlns:a="http://schemas.openxmlformats.org/drawingml/2006/main">
               <a:ext uri="{FF2B5EF4-FFF2-40B4-BE49-F238E27FC236}">
-                <a16:creationId xmlns:a16="http://schemas.microsoft.com/office/drawing/2014/main" id="{45CB858B-7F04-4557-8A83-576F3106C6AB}"/>
+                <a16:creationId xmlns:a16="http://schemas.microsoft.com/office/drawing/2014/main" id="{3D786EE8-5909-4960-B8B2-FFBF742F4F61}"/>
               </a:ext>
             </a:extLst>
           </p:cNvPr>
@@ -2987,7 +2987,7 @@
           <p:cNvPr id="5" name="">
             <a:extLst xmlns:a="http://schemas.openxmlformats.org/drawingml/2006/main">
               <a:ext uri="{FF2B5EF4-FFF2-40B4-BE49-F238E27FC236}">
-                <a16:creationId xmlns:a16="http://schemas.microsoft.com/office/drawing/2014/main" id="{6A6B2B9D-015E-46BC-AFE6-29DE4FE4EB5B}"/>
+                <a16:creationId xmlns:a16="http://schemas.microsoft.com/office/drawing/2014/main" id="{45266769-A74F-43E1-97D7-F6F1349ABA27}"/>
               </a:ext>
             </a:extLst>
           </p:cNvPr>
@@ -3044,7 +3044,7 @@
           <p:cNvPr id="6" name="">
             <a:extLst xmlns:a="http://schemas.openxmlformats.org/drawingml/2006/main">
               <a:ext uri="{FF2B5EF4-FFF2-40B4-BE49-F238E27FC236}">
-                <a16:creationId xmlns:a16="http://schemas.microsoft.com/office/drawing/2014/main" id="{809DAF63-5BB4-43EB-B20A-9D7674E01831}"/>
+                <a16:creationId xmlns:a16="http://schemas.microsoft.com/office/drawing/2014/main" id="{8D757C32-F0C7-42E3-B139-14F8E931DBCB}"/>
               </a:ext>
             </a:extLst>
           </p:cNvPr>
@@ -3101,7 +3101,7 @@
           <p:cNvPr id="7" name="">
             <a:extLst xmlns:a="http://schemas.openxmlformats.org/drawingml/2006/main">
               <a:ext uri="{FF2B5EF4-FFF2-40B4-BE49-F238E27FC236}">
-                <a16:creationId xmlns:a16="http://schemas.microsoft.com/office/drawing/2014/main" id="{8E76F400-08BD-4177-8140-B59103B31698}"/>
+                <a16:creationId xmlns:a16="http://schemas.microsoft.com/office/drawing/2014/main" id="{6781DBDD-2BA6-4C99-A9A1-567A3C5BADAF}"/>
               </a:ext>
             </a:extLst>
           </p:cNvPr>
@@ -3158,7 +3158,7 @@
           <p:cNvPr id="8" name="">
             <a:extLst xmlns:a="http://schemas.openxmlformats.org/drawingml/2006/main">
               <a:ext uri="{FF2B5EF4-FFF2-40B4-BE49-F238E27FC236}">
-                <a16:creationId xmlns:a16="http://schemas.microsoft.com/office/drawing/2014/main" id="{B31D74AD-36A0-4E5D-89E9-C5707F6745CA}"/>
+                <a16:creationId xmlns:a16="http://schemas.microsoft.com/office/drawing/2014/main" id="{EA89E39D-F9FE-4B76-A963-6AB60C0C4703}"/>
               </a:ext>
             </a:extLst>
           </p:cNvPr>
@@ -3215,7 +3215,7 @@
           <p:cNvPr id="9" name="">
             <a:extLst xmlns:a="http://schemas.openxmlformats.org/drawingml/2006/main">
               <a:ext uri="{FF2B5EF4-FFF2-40B4-BE49-F238E27FC236}">
-                <a16:creationId xmlns:a16="http://schemas.microsoft.com/office/drawing/2014/main" id="{6ACCC3ED-62FA-4AB7-8D00-DD8C06E9594B}"/>
+                <a16:creationId xmlns:a16="http://schemas.microsoft.com/office/drawing/2014/main" id="{A7E694C9-07AD-4821-A107-7E7C4B9F2849}"/>
               </a:ext>
             </a:extLst>
           </p:cNvPr>
@@ -3270,7 +3270,7 @@
     </p:spTree>
     <p:extLst>
       <p:ext uri="{BB962C8B-B14F-4D97-AF65-F5344CB8AC3E}">
-        <p14:creationId xmlns:p14="http://schemas.microsoft.com/office/powerpoint/2010/main" val="937375990"/>
+        <p14:creationId xmlns:p14="http://schemas.microsoft.com/office/powerpoint/2010/main" val="880491185"/>
       </p:ext>
     </p:extLst>
   </p:cSld>
@@ -3301,7 +3301,7 @@
           <p:cNvPr id="10" name="">
             <a:extLst xmlns:a="http://schemas.openxmlformats.org/drawingml/2006/main">
               <a:ext uri="{FF2B5EF4-FFF2-40B4-BE49-F238E27FC236}">
-                <a16:creationId xmlns:a16="http://schemas.microsoft.com/office/drawing/2014/main" id="{F05899A8-7EF7-4E73-BC46-06385D40653D}"/>
+                <a16:creationId xmlns:a16="http://schemas.microsoft.com/office/drawing/2014/main" id="{9A47E97C-E678-4485-BE14-4D66E76D9D54}"/>
               </a:ext>
             </a:extLst>
           </p:cNvPr>
@@ -3358,7 +3358,7 @@
           <p:cNvPr id="2" name="">
             <a:extLst xmlns:a="http://schemas.openxmlformats.org/drawingml/2006/main">
               <a:ext uri="{FF2B5EF4-FFF2-40B4-BE49-F238E27FC236}">
-                <a16:creationId xmlns:a16="http://schemas.microsoft.com/office/drawing/2014/main" id="{F3B50217-EBCA-46B2-90BA-C4B599575AB0}"/>
+                <a16:creationId xmlns:a16="http://schemas.microsoft.com/office/drawing/2014/main" id="{1E181E48-4E3B-4886-BEC2-8BAA5D4402EF}"/>
               </a:ext>
             </a:extLst>
           </p:cNvPr>
@@ -3415,7 +3415,7 @@
           <p:cNvPr id="3" name="">
             <a:extLst xmlns:a="http://schemas.openxmlformats.org/drawingml/2006/main">
               <a:ext uri="{FF2B5EF4-FFF2-40B4-BE49-F238E27FC236}">
-                <a16:creationId xmlns:a16="http://schemas.microsoft.com/office/drawing/2014/main" id="{22B39A35-941F-4776-9161-C9187E1B1787}"/>
+                <a16:creationId xmlns:a16="http://schemas.microsoft.com/office/drawing/2014/main" id="{E12FEA3C-4B98-4384-A050-2BC70DC552CF}"/>
               </a:ext>
             </a:extLst>
           </p:cNvPr>
@@ -3472,7 +3472,7 @@
           <p:cNvPr id="4" name="">
             <a:extLst xmlns:a="http://schemas.openxmlformats.org/drawingml/2006/main">
               <a:ext uri="{FF2B5EF4-FFF2-40B4-BE49-F238E27FC236}">
-                <a16:creationId xmlns:a16="http://schemas.microsoft.com/office/drawing/2014/main" id="{FA771051-2FCB-4641-A6F3-D25235F669E9}"/>
+                <a16:creationId xmlns:a16="http://schemas.microsoft.com/office/drawing/2014/main" id="{B2D941CE-1FF3-4FB2-8062-E07341CF739E}"/>
               </a:ext>
             </a:extLst>
           </p:cNvPr>
@@ -3529,7 +3529,7 @@
           <p:cNvPr id="5" name="">
             <a:extLst xmlns:a="http://schemas.openxmlformats.org/drawingml/2006/main">
               <a:ext uri="{FF2B5EF4-FFF2-40B4-BE49-F238E27FC236}">
-                <a16:creationId xmlns:a16="http://schemas.microsoft.com/office/drawing/2014/main" id="{5B90E4D4-1F3D-4E7C-BE73-ECCD8E8104EF}"/>
+                <a16:creationId xmlns:a16="http://schemas.microsoft.com/office/drawing/2014/main" id="{86142F4D-0A2D-4ADA-BD71-689103FF0BE1}"/>
               </a:ext>
             </a:extLst>
           </p:cNvPr>
@@ -3586,7 +3586,7 @@
           <p:cNvPr id="6" name="">
             <a:extLst xmlns:a="http://schemas.openxmlformats.org/drawingml/2006/main">
               <a:ext uri="{FF2B5EF4-FFF2-40B4-BE49-F238E27FC236}">
-                <a16:creationId xmlns:a16="http://schemas.microsoft.com/office/drawing/2014/main" id="{2E26D81B-685A-49AA-84B2-FFAA07C48488}"/>
+                <a16:creationId xmlns:a16="http://schemas.microsoft.com/office/drawing/2014/main" id="{7E1F04CD-A69F-4E0D-89D0-E3F401E40AA3}"/>
               </a:ext>
             </a:extLst>
           </p:cNvPr>
@@ -3643,7 +3643,7 @@
           <p:cNvPr id="7" name="">
             <a:extLst xmlns:a="http://schemas.openxmlformats.org/drawingml/2006/main">
               <a:ext uri="{FF2B5EF4-FFF2-40B4-BE49-F238E27FC236}">
-                <a16:creationId xmlns:a16="http://schemas.microsoft.com/office/drawing/2014/main" id="{9DAF48F8-1F7B-4569-9B03-1E65CCA2E5D2}"/>
+                <a16:creationId xmlns:a16="http://schemas.microsoft.com/office/drawing/2014/main" id="{91247199-1A16-497E-BDA7-D0A6FA979E5E}"/>
               </a:ext>
             </a:extLst>
           </p:cNvPr>
@@ -3700,7 +3700,7 @@
           <p:cNvPr id="8" name="">
             <a:extLst xmlns:a="http://schemas.openxmlformats.org/drawingml/2006/main">
               <a:ext uri="{FF2B5EF4-FFF2-40B4-BE49-F238E27FC236}">
-                <a16:creationId xmlns:a16="http://schemas.microsoft.com/office/drawing/2014/main" id="{A678E454-ACFB-4CE9-98E9-7F7939EF0029}"/>
+                <a16:creationId xmlns:a16="http://schemas.microsoft.com/office/drawing/2014/main" id="{D92E5D86-A157-4D5C-B0B9-C1C9C35A97DC}"/>
               </a:ext>
             </a:extLst>
           </p:cNvPr>
@@ -3747,7 +3747,7 @@
                 <a:ea typeface="Heiti TC"/>
                 <a:cs typeface="Heiti TC"/>
               </a:rPr>
-              <a:t>記錄真實類別及預測；若 A 全對，可寫「未見錯誤」</a:t>
+              <a:t>分數最高的類別，就是模型這次的選擇</a:t>
             </a:r>
           </a:p>
         </p:txBody>
@@ -3757,7 +3757,7 @@
           <p:cNvPr id="9" name="">
             <a:extLst xmlns:a="http://schemas.openxmlformats.org/drawingml/2006/main">
               <a:ext uri="{FF2B5EF4-FFF2-40B4-BE49-F238E27FC236}">
-                <a16:creationId xmlns:a16="http://schemas.microsoft.com/office/drawing/2014/main" id="{92177863-7A61-4C77-B452-756F90DA67DD}"/>
+                <a16:creationId xmlns:a16="http://schemas.microsoft.com/office/drawing/2014/main" id="{0B5D817A-532A-4AA0-AA33-D48A4DCD465E}"/>
               </a:ext>
             </a:extLst>
           </p:cNvPr>
@@ -3804,7 +3804,7 @@
                 <a:ea typeface="Arial"/>
                 <a:cs typeface="Arial"/>
               </a:rPr>
-              <a:t>Record actual and predicted classes. If A is all correct, write “none found”</a:t>
+              <a:t>The highest-scoring class is the model’s choice</a:t>
             </a:r>
           </a:p>
         </p:txBody>
@@ -3812,7 +3812,7 @@
     </p:spTree>
     <p:extLst>
       <p:ext uri="{BB962C8B-B14F-4D97-AF65-F5344CB8AC3E}">
-        <p14:creationId xmlns:p14="http://schemas.microsoft.com/office/powerpoint/2010/main" val="590336628"/>
+        <p14:creationId xmlns:p14="http://schemas.microsoft.com/office/powerpoint/2010/main" val="659406293"/>
       </p:ext>
     </p:extLst>
   </p:cSld>
@@ -3843,7 +3843,7 @@
           <p:cNvPr id="10" name="">
             <a:extLst xmlns:a="http://schemas.openxmlformats.org/drawingml/2006/main">
               <a:ext uri="{FF2B5EF4-FFF2-40B4-BE49-F238E27FC236}">
-                <a16:creationId xmlns:a16="http://schemas.microsoft.com/office/drawing/2014/main" id="{EF894CCE-7E91-4335-8D82-5BC4496CBFC3}"/>
+                <a16:creationId xmlns:a16="http://schemas.microsoft.com/office/drawing/2014/main" id="{85561F27-7119-4097-BF8D-B41762E4A43F}"/>
               </a:ext>
             </a:extLst>
           </p:cNvPr>
@@ -3900,7 +3900,7 @@
           <p:cNvPr id="2" name="">
             <a:extLst xmlns:a="http://schemas.openxmlformats.org/drawingml/2006/main">
               <a:ext uri="{FF2B5EF4-FFF2-40B4-BE49-F238E27FC236}">
-                <a16:creationId xmlns:a16="http://schemas.microsoft.com/office/drawing/2014/main" id="{9BE895D0-8ACD-4DB5-8B19-AD02EF9703D6}"/>
+                <a16:creationId xmlns:a16="http://schemas.microsoft.com/office/drawing/2014/main" id="{50435127-95AC-4265-B78C-606A3CDB1993}"/>
               </a:ext>
             </a:extLst>
           </p:cNvPr>
@@ -3957,7 +3957,7 @@
           <p:cNvPr id="3" name="">
             <a:extLst xmlns:a="http://schemas.openxmlformats.org/drawingml/2006/main">
               <a:ext uri="{FF2B5EF4-FFF2-40B4-BE49-F238E27FC236}">
-                <a16:creationId xmlns:a16="http://schemas.microsoft.com/office/drawing/2014/main" id="{64BEE2E3-2FE7-473B-B7A3-9CE9BA6791CB}"/>
+                <a16:creationId xmlns:a16="http://schemas.microsoft.com/office/drawing/2014/main" id="{ACD91FAD-460C-4D47-9130-31FF6753AA32}"/>
               </a:ext>
             </a:extLst>
           </p:cNvPr>
@@ -4021,7 +4021,7 @@
         </p:xfrm>
         <a:graphic xmlns:a="http://schemas.openxmlformats.org/drawingml/2006/main">
           <a:graphicData uri="http://schemas.openxmlformats.org/drawingml/2006/chart">
-            <c:chart xmlns:r="http://schemas.openxmlformats.org/officeDocument/2006/relationships" xmlns:c="http://schemas.openxmlformats.org/drawingml/2006/chart" r:id="R4d456a2e34174517"/>
+            <c:chart xmlns:r="http://schemas.openxmlformats.org/officeDocument/2006/relationships" xmlns:c="http://schemas.openxmlformats.org/drawingml/2006/chart" r:id="R9a820ebbf6544de8"/>
           </a:graphicData>
         </a:graphic>
       </p:graphicFrame>
@@ -4030,7 +4030,7 @@
           <p:cNvPr id="5" name="">
             <a:extLst xmlns:a="http://schemas.openxmlformats.org/drawingml/2006/main">
               <a:ext uri="{FF2B5EF4-FFF2-40B4-BE49-F238E27FC236}">
-                <a16:creationId xmlns:a16="http://schemas.microsoft.com/office/drawing/2014/main" id="{F57ABF48-DEB2-44BC-948A-FAB79DFFDB3A}"/>
+                <a16:creationId xmlns:a16="http://schemas.microsoft.com/office/drawing/2014/main" id="{2436C8D1-C2E2-4750-B7F3-DAE0AF409867}"/>
               </a:ext>
             </a:extLst>
           </p:cNvPr>
@@ -4087,7 +4087,7 @@
           <p:cNvPr id="6" name="">
             <a:extLst xmlns:a="http://schemas.openxmlformats.org/drawingml/2006/main">
               <a:ext uri="{FF2B5EF4-FFF2-40B4-BE49-F238E27FC236}">
-                <a16:creationId xmlns:a16="http://schemas.microsoft.com/office/drawing/2014/main" id="{39BCE1BB-D01C-4AEB-BF38-3A806499DA22}"/>
+                <a16:creationId xmlns:a16="http://schemas.microsoft.com/office/drawing/2014/main" id="{35E94C56-61C5-4AA9-B646-27148DC3CC7E}"/>
               </a:ext>
             </a:extLst>
           </p:cNvPr>
@@ -4144,7 +4144,7 @@
           <p:cNvPr id="7" name="">
             <a:extLst xmlns:a="http://schemas.openxmlformats.org/drawingml/2006/main">
               <a:ext uri="{FF2B5EF4-FFF2-40B4-BE49-F238E27FC236}">
-                <a16:creationId xmlns:a16="http://schemas.microsoft.com/office/drawing/2014/main" id="{76353247-86F1-4DCD-B4F7-4A1B6288F425}"/>
+                <a16:creationId xmlns:a16="http://schemas.microsoft.com/office/drawing/2014/main" id="{300E5B6C-5C73-41F4-B616-C6B3020E36E7}"/>
               </a:ext>
             </a:extLst>
           </p:cNvPr>
@@ -4201,7 +4201,7 @@
           <p:cNvPr id="8" name="">
             <a:extLst xmlns:a="http://schemas.openxmlformats.org/drawingml/2006/main">
               <a:ext uri="{FF2B5EF4-FFF2-40B4-BE49-F238E27FC236}">
-                <a16:creationId xmlns:a16="http://schemas.microsoft.com/office/drawing/2014/main" id="{7B061C77-A20A-487C-9211-44E8BFBEE5CE}"/>
+                <a16:creationId xmlns:a16="http://schemas.microsoft.com/office/drawing/2014/main" id="{0DCFA828-CE9F-41A7-A60E-0F7E601DBD85}"/>
               </a:ext>
             </a:extLst>
           </p:cNvPr>
@@ -4258,7 +4258,7 @@
           <p:cNvPr id="9" name="">
             <a:extLst xmlns:a="http://schemas.openxmlformats.org/drawingml/2006/main">
               <a:ext uri="{FF2B5EF4-FFF2-40B4-BE49-F238E27FC236}">
-                <a16:creationId xmlns:a16="http://schemas.microsoft.com/office/drawing/2014/main" id="{0156BED7-7224-412C-BE40-7C737A12CC3D}"/>
+                <a16:creationId xmlns:a16="http://schemas.microsoft.com/office/drawing/2014/main" id="{1013E626-7821-4AD7-9CDA-E197267E7964}"/>
               </a:ext>
             </a:extLst>
           </p:cNvPr>
@@ -4313,7 +4313,7 @@
     </p:spTree>
     <p:extLst>
       <p:ext uri="{BB962C8B-B14F-4D97-AF65-F5344CB8AC3E}">
-        <p14:creationId xmlns:p14="http://schemas.microsoft.com/office/powerpoint/2010/main" val="220666931"/>
+        <p14:creationId xmlns:p14="http://schemas.microsoft.com/office/powerpoint/2010/main" val="1745271285"/>
       </p:ext>
     </p:extLst>
   </p:cSld>
@@ -4344,7 +4344,7 @@
           <p:cNvPr id="10" name="">
             <a:extLst xmlns:a="http://schemas.openxmlformats.org/drawingml/2006/main">
               <a:ext uri="{FF2B5EF4-FFF2-40B4-BE49-F238E27FC236}">
-                <a16:creationId xmlns:a16="http://schemas.microsoft.com/office/drawing/2014/main" id="{8529D722-8A86-405A-890E-109DDD8B9A06}"/>
+                <a16:creationId xmlns:a16="http://schemas.microsoft.com/office/drawing/2014/main" id="{83758A6B-221C-4B92-9A7E-0D285C521A55}"/>
               </a:ext>
             </a:extLst>
           </p:cNvPr>
@@ -4401,7 +4401,7 @@
           <p:cNvPr id="2" name="">
             <a:extLst xmlns:a="http://schemas.openxmlformats.org/drawingml/2006/main">
               <a:ext uri="{FF2B5EF4-FFF2-40B4-BE49-F238E27FC236}">
-                <a16:creationId xmlns:a16="http://schemas.microsoft.com/office/drawing/2014/main" id="{AC0607E2-74F4-436E-8B33-6F163048A135}"/>
+                <a16:creationId xmlns:a16="http://schemas.microsoft.com/office/drawing/2014/main" id="{B5D9706D-0A96-43E9-A9FD-7AD0CEC8EEF9}"/>
               </a:ext>
             </a:extLst>
           </p:cNvPr>
@@ -4458,7 +4458,7 @@
           <p:cNvPr id="3" name="">
             <a:extLst xmlns:a="http://schemas.openxmlformats.org/drawingml/2006/main">
               <a:ext uri="{FF2B5EF4-FFF2-40B4-BE49-F238E27FC236}">
-                <a16:creationId xmlns:a16="http://schemas.microsoft.com/office/drawing/2014/main" id="{21A137DA-3B2F-4F81-B7EE-6E8A3CB8743E}"/>
+                <a16:creationId xmlns:a16="http://schemas.microsoft.com/office/drawing/2014/main" id="{60083F26-4DA5-4416-8733-24A5DB97ACD8}"/>
               </a:ext>
             </a:extLst>
           </p:cNvPr>
@@ -4515,7 +4515,7 @@
           <p:cNvPr id="4" name="">
             <a:extLst xmlns:a="http://schemas.openxmlformats.org/drawingml/2006/main">
               <a:ext uri="{FF2B5EF4-FFF2-40B4-BE49-F238E27FC236}">
-                <a16:creationId xmlns:a16="http://schemas.microsoft.com/office/drawing/2014/main" id="{31B63ECF-FC68-4AE2-A751-82353F95358B}"/>
+                <a16:creationId xmlns:a16="http://schemas.microsoft.com/office/drawing/2014/main" id="{02CB339E-04F3-459A-A104-2D4BC6A3DF7B}"/>
               </a:ext>
             </a:extLst>
           </p:cNvPr>
@@ -4562,7 +4562,7 @@
                 <a:ea typeface="Heiti TC"/>
                 <a:cs typeface="Heiti TC"/>
               </a:rPr>
-              <a:t>看看 A 的錯誤：哪些角度、距離或背景較困難？</a:t>
+              <a:t>看看 A 的結果；若有錯誤，檢查當時的圖片</a:t>
             </a:r>
           </a:p>
         </p:txBody>
@@ -4572,7 +4572,7 @@
           <p:cNvPr id="5" name="">
             <a:extLst xmlns:a="http://schemas.openxmlformats.org/drawingml/2006/main">
               <a:ext uri="{FF2B5EF4-FFF2-40B4-BE49-F238E27FC236}">
-                <a16:creationId xmlns:a16="http://schemas.microsoft.com/office/drawing/2014/main" id="{CD203A5E-449E-41B9-B4CA-D9CB097374C0}"/>
+                <a16:creationId xmlns:a16="http://schemas.microsoft.com/office/drawing/2014/main" id="{6B455A86-AD66-491B-ABE0-5DF0BF641B8B}"/>
               </a:ext>
             </a:extLst>
           </p:cNvPr>
@@ -4619,7 +4619,7 @@
                 <a:ea typeface="Arial"/>
                 <a:cs typeface="Arial"/>
               </a:rPr>
-              <a:t>Inspect mistakes on A. Which views were difficult?</a:t>
+              <a:t>Examine A’s results. If there is a mistake, inspect that image</a:t>
             </a:r>
           </a:p>
         </p:txBody>
@@ -4629,7 +4629,7 @@
           <p:cNvPr id="6" name="">
             <a:extLst xmlns:a="http://schemas.openxmlformats.org/drawingml/2006/main">
               <a:ext uri="{FF2B5EF4-FFF2-40B4-BE49-F238E27FC236}">
-                <a16:creationId xmlns:a16="http://schemas.microsoft.com/office/drawing/2014/main" id="{0F9C2CF4-E5E8-4288-9ED5-ABDD5A8B2814}"/>
+                <a16:creationId xmlns:a16="http://schemas.microsoft.com/office/drawing/2014/main" id="{F763E177-9AFC-4627-9287-3444C6C62E5C}"/>
               </a:ext>
             </a:extLst>
           </p:cNvPr>
@@ -4686,7 +4686,7 @@
           <p:cNvPr id="7" name="">
             <a:extLst xmlns:a="http://schemas.openxmlformats.org/drawingml/2006/main">
               <a:ext uri="{FF2B5EF4-FFF2-40B4-BE49-F238E27FC236}">
-                <a16:creationId xmlns:a16="http://schemas.microsoft.com/office/drawing/2014/main" id="{4BD13058-D5F5-4E20-B6FD-498C28A60ECC}"/>
+                <a16:creationId xmlns:a16="http://schemas.microsoft.com/office/drawing/2014/main" id="{8E0D84A8-2A7B-401B-A0AA-BA948FAFE598}"/>
               </a:ext>
             </a:extLst>
           </p:cNvPr>
@@ -4743,7 +4743,7 @@
           <p:cNvPr id="8" name="">
             <a:extLst xmlns:a="http://schemas.openxmlformats.org/drawingml/2006/main">
               <a:ext uri="{FF2B5EF4-FFF2-40B4-BE49-F238E27FC236}">
-                <a16:creationId xmlns:a16="http://schemas.microsoft.com/office/drawing/2014/main" id="{A3F90B1B-48DA-4EB4-8879-B199DA8D869F}"/>
+                <a16:creationId xmlns:a16="http://schemas.microsoft.com/office/drawing/2014/main" id="{9618BCC1-6B58-4DF2-B1F0-DAC59115174F}"/>
               </a:ext>
             </a:extLst>
           </p:cNvPr>
@@ -4800,7 +4800,7 @@
           <p:cNvPr id="9" name="">
             <a:extLst xmlns:a="http://schemas.openxmlformats.org/drawingml/2006/main">
               <a:ext uri="{FF2B5EF4-FFF2-40B4-BE49-F238E27FC236}">
-                <a16:creationId xmlns:a16="http://schemas.microsoft.com/office/drawing/2014/main" id="{7C434440-F820-48B5-83AF-2974239C841D}"/>
+                <a16:creationId xmlns:a16="http://schemas.microsoft.com/office/drawing/2014/main" id="{A7B47E72-133F-4EB9-A5D9-03883FBE90EF}"/>
               </a:ext>
             </a:extLst>
           </p:cNvPr>
@@ -4855,7 +4855,7 @@
     </p:spTree>
     <p:extLst>
       <p:ext uri="{BB962C8B-B14F-4D97-AF65-F5344CB8AC3E}">
-        <p14:creationId xmlns:p14="http://schemas.microsoft.com/office/powerpoint/2010/main" val="826453566"/>
+        <p14:creationId xmlns:p14="http://schemas.microsoft.com/office/powerpoint/2010/main" val="207045510"/>
       </p:ext>
     </p:extLst>
   </p:cSld>
@@ -4886,7 +4886,7 @@
           <p:cNvPr id="10" name="">
             <a:extLst xmlns:a="http://schemas.openxmlformats.org/drawingml/2006/main">
               <a:ext uri="{FF2B5EF4-FFF2-40B4-BE49-F238E27FC236}">
-                <a16:creationId xmlns:a16="http://schemas.microsoft.com/office/drawing/2014/main" id="{5712E095-68BE-4768-A411-43FA1946365B}"/>
+                <a16:creationId xmlns:a16="http://schemas.microsoft.com/office/drawing/2014/main" id="{D4C0285F-FA61-4589-AC32-3442016A15E0}"/>
               </a:ext>
             </a:extLst>
           </p:cNvPr>
@@ -4943,7 +4943,7 @@
           <p:cNvPr id="2" name="">
             <a:extLst xmlns:a="http://schemas.openxmlformats.org/drawingml/2006/main">
               <a:ext uri="{FF2B5EF4-FFF2-40B4-BE49-F238E27FC236}">
-                <a16:creationId xmlns:a16="http://schemas.microsoft.com/office/drawing/2014/main" id="{E89F8206-4C27-4609-B1E0-13212FEC6273}"/>
+                <a16:creationId xmlns:a16="http://schemas.microsoft.com/office/drawing/2014/main" id="{F972333E-B450-496B-B5FD-F0F98616FD7A}"/>
               </a:ext>
             </a:extLst>
           </p:cNvPr>
@@ -5000,7 +5000,7 @@
           <p:cNvPr id="3" name="">
             <a:extLst xmlns:a="http://schemas.openxmlformats.org/drawingml/2006/main">
               <a:ext uri="{FF2B5EF4-FFF2-40B4-BE49-F238E27FC236}">
-                <a16:creationId xmlns:a16="http://schemas.microsoft.com/office/drawing/2014/main" id="{44387192-69A5-428C-8998-8F3F81335A31}"/>
+                <a16:creationId xmlns:a16="http://schemas.microsoft.com/office/drawing/2014/main" id="{586F8A60-C64B-4D9A-8495-00A4D4CE332C}"/>
               </a:ext>
             </a:extLst>
           </p:cNvPr>
@@ -5057,7 +5057,7 @@
           <p:cNvPr id="4" name="">
             <a:extLst xmlns:a="http://schemas.openxmlformats.org/drawingml/2006/main">
               <a:ext uri="{FF2B5EF4-FFF2-40B4-BE49-F238E27FC236}">
-                <a16:creationId xmlns:a16="http://schemas.microsoft.com/office/drawing/2014/main" id="{B07688EB-C00C-415B-9B6F-64260154B4BB}"/>
+                <a16:creationId xmlns:a16="http://schemas.microsoft.com/office/drawing/2014/main" id="{2584B8B4-C512-4E9E-ADA9-B3344DB1CDA5}"/>
               </a:ext>
             </a:extLst>
           </p:cNvPr>
@@ -5104,7 +5104,7 @@
                 <a:ea typeface="Heiti TC"/>
                 <a:cs typeface="Heiti TC"/>
               </a:rPr>
-              <a:t>換成水樽或間尺，先猜模型會選哪一類</a:t>
+              <a:t>換成水樽，先猜模型會選哪一類</a:t>
             </a:r>
           </a:p>
         </p:txBody>
@@ -5114,7 +5114,7 @@
           <p:cNvPr id="5" name="">
             <a:extLst xmlns:a="http://schemas.openxmlformats.org/drawingml/2006/main">
               <a:ext uri="{FF2B5EF4-FFF2-40B4-BE49-F238E27FC236}">
-                <a16:creationId xmlns:a16="http://schemas.microsoft.com/office/drawing/2014/main" id="{80FED9E3-FE29-4A92-A469-C4B2AA1209D4}"/>
+                <a16:creationId xmlns:a16="http://schemas.microsoft.com/office/drawing/2014/main" id="{4D543155-9F2E-46AB-85A1-566B0597A3C3}"/>
               </a:ext>
             </a:extLst>
           </p:cNvPr>
@@ -5161,7 +5161,7 @@
                 <a:ea typeface="Arial"/>
                 <a:cs typeface="Arial"/>
               </a:rPr>
-              <a:t>Try a bottle or ruler. Guess which class the model will choose</a:t>
+              <a:t>Try a bottle. Guess which class the model will choose</a:t>
             </a:r>
           </a:p>
         </p:txBody>
@@ -5171,7 +5171,7 @@
           <p:cNvPr id="6" name="">
             <a:extLst xmlns:a="http://schemas.openxmlformats.org/drawingml/2006/main">
               <a:ext uri="{FF2B5EF4-FFF2-40B4-BE49-F238E27FC236}">
-                <a16:creationId xmlns:a16="http://schemas.microsoft.com/office/drawing/2014/main" id="{B8E370F6-CF66-46A3-97FD-06377E7E9B97}"/>
+                <a16:creationId xmlns:a16="http://schemas.microsoft.com/office/drawing/2014/main" id="{F3265480-B2EB-480B-8983-5743416A5F12}"/>
               </a:ext>
             </a:extLst>
           </p:cNvPr>
@@ -5228,7 +5228,7 @@
           <p:cNvPr id="7" name="">
             <a:extLst xmlns:a="http://schemas.openxmlformats.org/drawingml/2006/main">
               <a:ext uri="{FF2B5EF4-FFF2-40B4-BE49-F238E27FC236}">
-                <a16:creationId xmlns:a16="http://schemas.microsoft.com/office/drawing/2014/main" id="{1C9A612A-C96D-45AB-8A01-321AC4900262}"/>
+                <a16:creationId xmlns:a16="http://schemas.microsoft.com/office/drawing/2014/main" id="{E93F8315-5C77-4D42-B2C8-179F9F8D1B1E}"/>
               </a:ext>
             </a:extLst>
           </p:cNvPr>
@@ -5285,7 +5285,7 @@
           <p:cNvPr id="8" name="">
             <a:extLst xmlns:a="http://schemas.openxmlformats.org/drawingml/2006/main">
               <a:ext uri="{FF2B5EF4-FFF2-40B4-BE49-F238E27FC236}">
-                <a16:creationId xmlns:a16="http://schemas.microsoft.com/office/drawing/2014/main" id="{E4C4D405-41BA-4956-9F76-0FD7D3623FB3}"/>
+                <a16:creationId xmlns:a16="http://schemas.microsoft.com/office/drawing/2014/main" id="{BBF9F950-1355-411A-B883-D98EC6112C7E}"/>
               </a:ext>
             </a:extLst>
           </p:cNvPr>
@@ -5342,7 +5342,7 @@
           <p:cNvPr id="9" name="">
             <a:extLst xmlns:a="http://schemas.openxmlformats.org/drawingml/2006/main">
               <a:ext uri="{FF2B5EF4-FFF2-40B4-BE49-F238E27FC236}">
-                <a16:creationId xmlns:a16="http://schemas.microsoft.com/office/drawing/2014/main" id="{B98F9175-A2C4-486E-94D7-1E6BAB8C8460}"/>
+                <a16:creationId xmlns:a16="http://schemas.microsoft.com/office/drawing/2014/main" id="{F3CFFFC9-150F-4A5B-AD23-BDED1655F0CC}"/>
               </a:ext>
             </a:extLst>
           </p:cNvPr>
@@ -5397,7 +5397,7 @@
     </p:spTree>
     <p:extLst>
       <p:ext uri="{BB962C8B-B14F-4D97-AF65-F5344CB8AC3E}">
-        <p14:creationId xmlns:p14="http://schemas.microsoft.com/office/powerpoint/2010/main" val="1851309731"/>
+        <p14:creationId xmlns:p14="http://schemas.microsoft.com/office/powerpoint/2010/main" val="163340763"/>
       </p:ext>
     </p:extLst>
   </p:cSld>
@@ -5428,7 +5428,7 @@
           <p:cNvPr id="10" name="">
             <a:extLst xmlns:a="http://schemas.openxmlformats.org/drawingml/2006/main">
               <a:ext uri="{FF2B5EF4-FFF2-40B4-BE49-F238E27FC236}">
-                <a16:creationId xmlns:a16="http://schemas.microsoft.com/office/drawing/2014/main" id="{FBEC0866-B013-482C-BAD2-6970F52F414F}"/>
+                <a16:creationId xmlns:a16="http://schemas.microsoft.com/office/drawing/2014/main" id="{50B4912C-5EDF-43A2-9491-7D6F94F92803}"/>
               </a:ext>
             </a:extLst>
           </p:cNvPr>
@@ -5475,7 +5475,7 @@
                 <a:ea typeface="Heiti TC"/>
                 <a:cs typeface="Heiti TC"/>
               </a:rPr>
-              <a:t>你的偵探報告</a:t>
+              <a:t>分享你的觀察</a:t>
             </a:r>
           </a:p>
         </p:txBody>
@@ -5485,7 +5485,7 @@
           <p:cNvPr id="2" name="">
             <a:extLst xmlns:a="http://schemas.openxmlformats.org/drawingml/2006/main">
               <a:ext uri="{FF2B5EF4-FFF2-40B4-BE49-F238E27FC236}">
-                <a16:creationId xmlns:a16="http://schemas.microsoft.com/office/drawing/2014/main" id="{BCB83999-0EF2-4F38-8438-973BC88D79A8}"/>
+                <a16:creationId xmlns:a16="http://schemas.microsoft.com/office/drawing/2014/main" id="{5E5681FC-7F39-4FF9-924C-01055EF7B622}"/>
               </a:ext>
             </a:extLst>
           </p:cNvPr>
@@ -5532,7 +5532,7 @@
                 <a:ea typeface="Arial"/>
                 <a:cs typeface="Arial"/>
               </a:rPr>
-              <a:t>Your detective report</a:t>
+              <a:t>Share your observations</a:t>
             </a:r>
           </a:p>
         </p:txBody>
@@ -5542,7 +5542,7 @@
           <p:cNvPr id="3" name="">
             <a:extLst xmlns:a="http://schemas.openxmlformats.org/drawingml/2006/main">
               <a:ext uri="{FF2B5EF4-FFF2-40B4-BE49-F238E27FC236}">
-                <a16:creationId xmlns:a16="http://schemas.microsoft.com/office/drawing/2014/main" id="{3BA1589F-BFC7-48BE-A5B4-2180FBEA4A57}"/>
+                <a16:creationId xmlns:a16="http://schemas.microsoft.com/office/drawing/2014/main" id="{D7771953-6AB5-4A83-9E56-F6DE0CACDF37}"/>
               </a:ext>
             </a:extLst>
           </p:cNvPr>
@@ -5599,7 +5599,7 @@
           <p:cNvPr id="4" name="">
             <a:extLst xmlns:a="http://schemas.openxmlformats.org/drawingml/2006/main">
               <a:ext uri="{FF2B5EF4-FFF2-40B4-BE49-F238E27FC236}">
-                <a16:creationId xmlns:a16="http://schemas.microsoft.com/office/drawing/2014/main" id="{6EAFA45A-9750-4083-8A41-8EF7F425DC30}"/>
+                <a16:creationId xmlns:a16="http://schemas.microsoft.com/office/drawing/2014/main" id="{837B9E97-4BB4-4CA2-BA81-74162E568555}"/>
               </a:ext>
             </a:extLst>
           </p:cNvPr>
@@ -5656,7 +5656,7 @@
           <p:cNvPr id="5" name="">
             <a:extLst xmlns:a="http://schemas.openxmlformats.org/drawingml/2006/main">
               <a:ext uri="{FF2B5EF4-FFF2-40B4-BE49-F238E27FC236}">
-                <a16:creationId xmlns:a16="http://schemas.microsoft.com/office/drawing/2014/main" id="{32D2B690-C9E1-4640-A4A6-0C5F41F25D30}"/>
+                <a16:creationId xmlns:a16="http://schemas.microsoft.com/office/drawing/2014/main" id="{41F27B6F-11FD-4A67-B226-78C7A75F52A6}"/>
               </a:ext>
             </a:extLst>
           </p:cNvPr>
@@ -5713,7 +5713,7 @@
           <p:cNvPr id="6" name="">
             <a:extLst xmlns:a="http://schemas.openxmlformats.org/drawingml/2006/main">
               <a:ext uri="{FF2B5EF4-FFF2-40B4-BE49-F238E27FC236}">
-                <a16:creationId xmlns:a16="http://schemas.microsoft.com/office/drawing/2014/main" id="{ABBF6A97-EF38-493B-B52A-B85B4DF16795}"/>
+                <a16:creationId xmlns:a16="http://schemas.microsoft.com/office/drawing/2014/main" id="{82907C05-8D59-4BD6-BAB5-22F299DA3BFA}"/>
               </a:ext>
             </a:extLst>
           </p:cNvPr>
@@ -5770,7 +5770,7 @@
           <p:cNvPr id="7" name="">
             <a:extLst xmlns:a="http://schemas.openxmlformats.org/drawingml/2006/main">
               <a:ext uri="{FF2B5EF4-FFF2-40B4-BE49-F238E27FC236}">
-                <a16:creationId xmlns:a16="http://schemas.microsoft.com/office/drawing/2014/main" id="{08F946FD-E88E-4694-A7DC-11B96C430C5B}"/>
+                <a16:creationId xmlns:a16="http://schemas.microsoft.com/office/drawing/2014/main" id="{9CB71750-8714-4309-8980-843BE996ED4D}"/>
               </a:ext>
             </a:extLst>
           </p:cNvPr>
@@ -5827,7 +5827,7 @@
           <p:cNvPr id="8" name="">
             <a:extLst xmlns:a="http://schemas.openxmlformats.org/drawingml/2006/main">
               <a:ext uri="{FF2B5EF4-FFF2-40B4-BE49-F238E27FC236}">
-                <a16:creationId xmlns:a16="http://schemas.microsoft.com/office/drawing/2014/main" id="{BC24E589-7B53-4CF9-874C-BA5213E22C49}"/>
+                <a16:creationId xmlns:a16="http://schemas.microsoft.com/office/drawing/2014/main" id="{73539D28-D78A-4DC4-9A51-C4D6AEE9C31F}"/>
               </a:ext>
             </a:extLst>
           </p:cNvPr>
@@ -5884,7 +5884,7 @@
           <p:cNvPr id="9" name="">
             <a:extLst xmlns:a="http://schemas.openxmlformats.org/drawingml/2006/main">
               <a:ext uri="{FF2B5EF4-FFF2-40B4-BE49-F238E27FC236}">
-                <a16:creationId xmlns:a16="http://schemas.microsoft.com/office/drawing/2014/main" id="{3B323695-0FC1-4A40-8A90-04CFB605BD86}"/>
+                <a16:creationId xmlns:a16="http://schemas.microsoft.com/office/drawing/2014/main" id="{97EBCC7B-8800-4BB1-86AF-E2E7D05B7BB7}"/>
               </a:ext>
             </a:extLst>
           </p:cNvPr>
@@ -5939,7 +5939,7 @@
     </p:spTree>
     <p:extLst>
       <p:ext uri="{BB962C8B-B14F-4D97-AF65-F5344CB8AC3E}">
-        <p14:creationId xmlns:p14="http://schemas.microsoft.com/office/powerpoint/2010/main" val="1260981799"/>
+        <p14:creationId xmlns:p14="http://schemas.microsoft.com/office/powerpoint/2010/main" val="1138446219"/>
       </p:ext>
     </p:extLst>
   </p:cSld>
@@ -5970,7 +5970,7 @@
           <p:cNvPr id="10" name="">
             <a:extLst xmlns:a="http://schemas.openxmlformats.org/drawingml/2006/main">
               <a:ext uri="{FF2B5EF4-FFF2-40B4-BE49-F238E27FC236}">
-                <a16:creationId xmlns:a16="http://schemas.microsoft.com/office/drawing/2014/main" id="{416CCCA4-C76D-4177-B074-FEE761A07B1B}"/>
+                <a16:creationId xmlns:a16="http://schemas.microsoft.com/office/drawing/2014/main" id="{6ED5D4A5-8A7E-485B-927F-7379C879A1EA}"/>
               </a:ext>
             </a:extLst>
           </p:cNvPr>
@@ -6027,7 +6027,7 @@
           <p:cNvPr id="2" name="">
             <a:extLst xmlns:a="http://schemas.openxmlformats.org/drawingml/2006/main">
               <a:ext uri="{FF2B5EF4-FFF2-40B4-BE49-F238E27FC236}">
-                <a16:creationId xmlns:a16="http://schemas.microsoft.com/office/drawing/2014/main" id="{2B521AF2-70DD-44FA-9016-B583079F3BA7}"/>
+                <a16:creationId xmlns:a16="http://schemas.microsoft.com/office/drawing/2014/main" id="{B5A86E6C-1AF5-4148-A3A8-22B9E85DF9B7}"/>
               </a:ext>
             </a:extLst>
           </p:cNvPr>
@@ -6084,7 +6084,7 @@
           <p:cNvPr id="3" name="">
             <a:extLst xmlns:a="http://schemas.openxmlformats.org/drawingml/2006/main">
               <a:ext uri="{FF2B5EF4-FFF2-40B4-BE49-F238E27FC236}">
-                <a16:creationId xmlns:a16="http://schemas.microsoft.com/office/drawing/2014/main" id="{1C6412A8-4125-45C2-A84C-0427F6DE1154}"/>
+                <a16:creationId xmlns:a16="http://schemas.microsoft.com/office/drawing/2014/main" id="{5BEB1A1D-8211-43B6-B0D9-285C066C12F2}"/>
               </a:ext>
             </a:extLst>
           </p:cNvPr>
@@ -6141,7 +6141,7 @@
           <p:cNvPr id="4" name="">
             <a:extLst xmlns:a="http://schemas.openxmlformats.org/drawingml/2006/main">
               <a:ext uri="{FF2B5EF4-FFF2-40B4-BE49-F238E27FC236}">
-                <a16:creationId xmlns:a16="http://schemas.microsoft.com/office/drawing/2014/main" id="{21E090D5-18B6-430D-B611-0052748E894F}"/>
+                <a16:creationId xmlns:a16="http://schemas.microsoft.com/office/drawing/2014/main" id="{7A761F34-41F9-4433-9DA0-618CE92218FA}"/>
               </a:ext>
             </a:extLst>
           </p:cNvPr>
@@ -6198,7 +6198,7 @@
           <p:cNvPr id="5" name="">
             <a:extLst xmlns:a="http://schemas.openxmlformats.org/drawingml/2006/main">
               <a:ext uri="{FF2B5EF4-FFF2-40B4-BE49-F238E27FC236}">
-                <a16:creationId xmlns:a16="http://schemas.microsoft.com/office/drawing/2014/main" id="{6BDDDE6B-CCDC-45BA-9961-B5EA3861C014}"/>
+                <a16:creationId xmlns:a16="http://schemas.microsoft.com/office/drawing/2014/main" id="{6BE243F5-B49D-450B-AA1B-3E682D87298C}"/>
               </a:ext>
             </a:extLst>
           </p:cNvPr>
@@ -6255,7 +6255,7 @@
           <p:cNvPr id="6" name="">
             <a:extLst xmlns:a="http://schemas.openxmlformats.org/drawingml/2006/main">
               <a:ext uri="{FF2B5EF4-FFF2-40B4-BE49-F238E27FC236}">
-                <a16:creationId xmlns:a16="http://schemas.microsoft.com/office/drawing/2014/main" id="{7B7AA6B4-CC12-4FC1-A961-858A2A013C71}"/>
+                <a16:creationId xmlns:a16="http://schemas.microsoft.com/office/drawing/2014/main" id="{389AF355-79FC-412B-B79F-7B429701E593}"/>
               </a:ext>
             </a:extLst>
           </p:cNvPr>
@@ -6302,7 +6302,7 @@
                 <a:ea typeface="Heiti TC"/>
                 <a:cs typeface="Heiti TC"/>
               </a:rPr>
-              <a:t>你仍認得，但模型的預測會一樣嗎？</a:t>
+              <a:t>換了背景，你仍認得這支筆嗎？</a:t>
             </a:r>
           </a:p>
         </p:txBody>
@@ -6312,7 +6312,7 @@
           <p:cNvPr id="7" name="">
             <a:extLst xmlns:a="http://schemas.openxmlformats.org/drawingml/2006/main">
               <a:ext uri="{FF2B5EF4-FFF2-40B4-BE49-F238E27FC236}">
-                <a16:creationId xmlns:a16="http://schemas.microsoft.com/office/drawing/2014/main" id="{C1CF76AD-84B8-4CC0-922B-C3241E38DC72}"/>
+                <a16:creationId xmlns:a16="http://schemas.microsoft.com/office/drawing/2014/main" id="{9DA6AD8F-BC97-4A59-852C-03B5029E3A81}"/>
               </a:ext>
             </a:extLst>
           </p:cNvPr>
@@ -6359,7 +6359,7 @@
                 <a:ea typeface="Arial"/>
                 <a:cs typeface="Arial"/>
               </a:rPr>
-              <a:t>You still recognise it. Will the model give the same prediction?</a:t>
+              <a:t>Can you still recognise the pen after its background changes?</a:t>
             </a:r>
           </a:p>
         </p:txBody>
@@ -6369,7 +6369,7 @@
           <p:cNvPr id="8" name="">
             <a:extLst xmlns:a="http://schemas.openxmlformats.org/drawingml/2006/main">
               <a:ext uri="{FF2B5EF4-FFF2-40B4-BE49-F238E27FC236}">
-                <a16:creationId xmlns:a16="http://schemas.microsoft.com/office/drawing/2014/main" id="{DFE55985-FAD0-47ED-B233-91FE7653C921}"/>
+                <a16:creationId xmlns:a16="http://schemas.microsoft.com/office/drawing/2014/main" id="{27849CA6-7D3E-4102-BF19-4123DA8B791D}"/>
               </a:ext>
             </a:extLst>
           </p:cNvPr>
@@ -6416,7 +6416,7 @@
                 <a:ea typeface="Heiti TC"/>
                 <a:cs typeface="Heiti TC"/>
               </a:rPr>
-              <a:t>先寫下你的猜測，稍後來「考考」模型</a:t>
+              <a:t>說說你看到的線索：形狀、顏色、邊緣</a:t>
             </a:r>
           </a:p>
         </p:txBody>
@@ -6426,7 +6426,7 @@
           <p:cNvPr id="9" name="">
             <a:extLst xmlns:a="http://schemas.openxmlformats.org/drawingml/2006/main">
               <a:ext uri="{FF2B5EF4-FFF2-40B4-BE49-F238E27FC236}">
-                <a16:creationId xmlns:a16="http://schemas.microsoft.com/office/drawing/2014/main" id="{10187A9E-1C42-448D-8D37-1005A6E12C90}"/>
+                <a16:creationId xmlns:a16="http://schemas.microsoft.com/office/drawing/2014/main" id="{CD4C3AA6-B42D-4010-AEF0-2B05BF32FCDB}"/>
               </a:ext>
             </a:extLst>
           </p:cNvPr>
@@ -6473,7 +6473,7 @@
                 <a:ea typeface="Arial"/>
                 <a:cs typeface="Arial"/>
               </a:rPr>
-              <a:t>Write your guess. We will challenge the model later</a:t>
+              <a:t>Discuss the clues you notice: shape, colour and edges</a:t>
             </a:r>
           </a:p>
         </p:txBody>
@@ -6481,7 +6481,7 @@
     </p:spTree>
     <p:extLst>
       <p:ext uri="{BB962C8B-B14F-4D97-AF65-F5344CB8AC3E}">
-        <p14:creationId xmlns:p14="http://schemas.microsoft.com/office/powerpoint/2010/main" val="1635891248"/>
+        <p14:creationId xmlns:p14="http://schemas.microsoft.com/office/powerpoint/2010/main" val="1416525770"/>
       </p:ext>
     </p:extLst>
   </p:cSld>
@@ -6512,7 +6512,7 @@
           <p:cNvPr id="10" name="">
             <a:extLst xmlns:a="http://schemas.openxmlformats.org/drawingml/2006/main">
               <a:ext uri="{FF2B5EF4-FFF2-40B4-BE49-F238E27FC236}">
-                <a16:creationId xmlns:a16="http://schemas.microsoft.com/office/drawing/2014/main" id="{A7CCD54D-0B97-4894-878B-5CEAD6F0BD20}"/>
+                <a16:creationId xmlns:a16="http://schemas.microsoft.com/office/drawing/2014/main" id="{9BF6BD3B-4364-4224-ACD7-519EF0971F96}"/>
               </a:ext>
             </a:extLst>
           </p:cNvPr>
@@ -6559,7 +6559,7 @@
                 <a:ea typeface="Heiti TC"/>
                 <a:cs typeface="Heiti TC"/>
               </a:rPr>
-              <a:t>今天教電腦認識三個類別</a:t>
+              <a:t>今天給電腦三個可選答案</a:t>
             </a:r>
           </a:p>
         </p:txBody>
@@ -6569,7 +6569,7 @@
           <p:cNvPr id="2" name="">
             <a:extLst xmlns:a="http://schemas.openxmlformats.org/drawingml/2006/main">
               <a:ext uri="{FF2B5EF4-FFF2-40B4-BE49-F238E27FC236}">
-                <a16:creationId xmlns:a16="http://schemas.microsoft.com/office/drawing/2014/main" id="{16450E4B-53BD-4FF9-932D-17338E9430EA}"/>
+                <a16:creationId xmlns:a16="http://schemas.microsoft.com/office/drawing/2014/main" id="{C23117EB-D08E-4AD0-8D81-66DC9AF925D6}"/>
               </a:ext>
             </a:extLst>
           </p:cNvPr>
@@ -6616,7 +6616,7 @@
                 <a:ea typeface="Arial"/>
                 <a:cs typeface="Arial"/>
               </a:rPr>
-              <a:t>Today we teach three classes</a:t>
+              <a:t>Today the computer has three possible answers</a:t>
             </a:r>
           </a:p>
         </p:txBody>
@@ -6626,7 +6626,7 @@
           <p:cNvPr id="3" name="">
             <a:extLst xmlns:a="http://schemas.openxmlformats.org/drawingml/2006/main">
               <a:ext uri="{FF2B5EF4-FFF2-40B4-BE49-F238E27FC236}">
-                <a16:creationId xmlns:a16="http://schemas.microsoft.com/office/drawing/2014/main" id="{43C259C0-076C-4B9E-9FA8-786B4AB82398}"/>
+                <a16:creationId xmlns:a16="http://schemas.microsoft.com/office/drawing/2014/main" id="{DB302CC0-3700-4993-9A31-23351CCB461B}"/>
               </a:ext>
             </a:extLst>
           </p:cNvPr>
@@ -6683,7 +6683,7 @@
           <p:cNvPr id="4" name="">
             <a:extLst xmlns:a="http://schemas.openxmlformats.org/drawingml/2006/main">
               <a:ext uri="{FF2B5EF4-FFF2-40B4-BE49-F238E27FC236}">
-                <a16:creationId xmlns:a16="http://schemas.microsoft.com/office/drawing/2014/main" id="{19C99B8B-03D3-4A1E-A2D6-C3524F6C5DD7}"/>
+                <a16:creationId xmlns:a16="http://schemas.microsoft.com/office/drawing/2014/main" id="{002CE4F6-A69E-48F4-818E-F330405BD595}"/>
               </a:ext>
             </a:extLst>
           </p:cNvPr>
@@ -6740,7 +6740,7 @@
           <p:cNvPr id="5" name="">
             <a:extLst xmlns:a="http://schemas.openxmlformats.org/drawingml/2006/main">
               <a:ext uri="{FF2B5EF4-FFF2-40B4-BE49-F238E27FC236}">
-                <a16:creationId xmlns:a16="http://schemas.microsoft.com/office/drawing/2014/main" id="{E734B3B6-373C-493E-90CA-B523447C69CE}"/>
+                <a16:creationId xmlns:a16="http://schemas.microsoft.com/office/drawing/2014/main" id="{A39F42BE-108A-4D27-B747-AA14A7C7A51E}"/>
               </a:ext>
             </a:extLst>
           </p:cNvPr>
@@ -6797,7 +6797,7 @@
           <p:cNvPr id="6" name="">
             <a:extLst xmlns:a="http://schemas.openxmlformats.org/drawingml/2006/main">
               <a:ext uri="{FF2B5EF4-FFF2-40B4-BE49-F238E27FC236}">
-                <a16:creationId xmlns:a16="http://schemas.microsoft.com/office/drawing/2014/main" id="{84FD26E2-3390-4C03-B735-826A65456CAA}"/>
+                <a16:creationId xmlns:a16="http://schemas.microsoft.com/office/drawing/2014/main" id="{B36C1CEA-878B-416B-BD5E-1699ACE6ABD4}"/>
               </a:ext>
             </a:extLst>
           </p:cNvPr>
@@ -6854,7 +6854,7 @@
           <p:cNvPr id="7" name="">
             <a:extLst xmlns:a="http://schemas.openxmlformats.org/drawingml/2006/main">
               <a:ext uri="{FF2B5EF4-FFF2-40B4-BE49-F238E27FC236}">
-                <a16:creationId xmlns:a16="http://schemas.microsoft.com/office/drawing/2014/main" id="{86F44A04-7F48-49C0-8A95-19ECDBE8CE39}"/>
+                <a16:creationId xmlns:a16="http://schemas.microsoft.com/office/drawing/2014/main" id="{356CE4C5-66C5-45FC-AFC8-19275ECD5F1C}"/>
               </a:ext>
             </a:extLst>
           </p:cNvPr>
@@ -6911,7 +6911,7 @@
           <p:cNvPr id="8" name="">
             <a:extLst xmlns:a="http://schemas.openxmlformats.org/drawingml/2006/main">
               <a:ext uri="{FF2B5EF4-FFF2-40B4-BE49-F238E27FC236}">
-                <a16:creationId xmlns:a16="http://schemas.microsoft.com/office/drawing/2014/main" id="{4A10A197-9B43-4DC3-9759-0FD318709B57}"/>
+                <a16:creationId xmlns:a16="http://schemas.microsoft.com/office/drawing/2014/main" id="{3E33996F-1CA7-48C4-91CC-9A4B45CB933D}"/>
               </a:ext>
             </a:extLst>
           </p:cNvPr>
@@ -6968,7 +6968,7 @@
           <p:cNvPr id="9" name="">
             <a:extLst xmlns:a="http://schemas.openxmlformats.org/drawingml/2006/main">
               <a:ext uri="{FF2B5EF4-FFF2-40B4-BE49-F238E27FC236}">
-                <a16:creationId xmlns:a16="http://schemas.microsoft.com/office/drawing/2014/main" id="{FC05991F-52D0-4217-85F7-81558C311B7C}"/>
+                <a16:creationId xmlns:a16="http://schemas.microsoft.com/office/drawing/2014/main" id="{D89C1D38-A7A7-4F29-98D8-1BF6FF7BB0FC}"/>
               </a:ext>
             </a:extLst>
           </p:cNvPr>
@@ -7023,7 +7023,7 @@
     </p:spTree>
     <p:extLst>
       <p:ext uri="{BB962C8B-B14F-4D97-AF65-F5344CB8AC3E}">
-        <p14:creationId xmlns:p14="http://schemas.microsoft.com/office/powerpoint/2010/main" val="162669419"/>
+        <p14:creationId xmlns:p14="http://schemas.microsoft.com/office/powerpoint/2010/main" val="648302006"/>
       </p:ext>
     </p:extLst>
   </p:cSld>
@@ -7054,7 +7054,7 @@
           <p:cNvPr id="10" name="">
             <a:extLst xmlns:a="http://schemas.openxmlformats.org/drawingml/2006/main">
               <a:ext uri="{FF2B5EF4-FFF2-40B4-BE49-F238E27FC236}">
-                <a16:creationId xmlns:a16="http://schemas.microsoft.com/office/drawing/2014/main" id="{A37B4E9C-CC02-4901-8FE6-475B20EA33B0}"/>
+                <a16:creationId xmlns:a16="http://schemas.microsoft.com/office/drawing/2014/main" id="{C52C9F13-0CCC-4086-90CC-5067FC5DF80F}"/>
               </a:ext>
             </a:extLst>
           </p:cNvPr>
@@ -7111,7 +7111,7 @@
           <p:cNvPr id="2" name="">
             <a:extLst xmlns:a="http://schemas.openxmlformats.org/drawingml/2006/main">
               <a:ext uri="{FF2B5EF4-FFF2-40B4-BE49-F238E27FC236}">
-                <a16:creationId xmlns:a16="http://schemas.microsoft.com/office/drawing/2014/main" id="{5781BDEA-5363-440D-AB0E-08F2ADEECBC3}"/>
+                <a16:creationId xmlns:a16="http://schemas.microsoft.com/office/drawing/2014/main" id="{A6DD2832-9279-4653-8BE0-E0AC6B878B1B}"/>
               </a:ext>
             </a:extLst>
           </p:cNvPr>
@@ -7168,7 +7168,7 @@
           <p:cNvPr id="3" name="">
             <a:extLst xmlns:a="http://schemas.openxmlformats.org/drawingml/2006/main">
               <a:ext uri="{FF2B5EF4-FFF2-40B4-BE49-F238E27FC236}">
-                <a16:creationId xmlns:a16="http://schemas.microsoft.com/office/drawing/2014/main" id="{D20CBD4F-807C-4DDE-A77D-9B2410015B3F}"/>
+                <a16:creationId xmlns:a16="http://schemas.microsoft.com/office/drawing/2014/main" id="{145903B7-CE08-4CFF-B5BB-C3400CA66406}"/>
               </a:ext>
             </a:extLst>
           </p:cNvPr>
@@ -7225,7 +7225,7 @@
           <p:cNvPr id="4" name="">
             <a:extLst xmlns:a="http://schemas.openxmlformats.org/drawingml/2006/main">
               <a:ext uri="{FF2B5EF4-FFF2-40B4-BE49-F238E27FC236}">
-                <a16:creationId xmlns:a16="http://schemas.microsoft.com/office/drawing/2014/main" id="{64A06DBF-57AC-42FA-8458-1E890FA0FFB0}"/>
+                <a16:creationId xmlns:a16="http://schemas.microsoft.com/office/drawing/2014/main" id="{F519CF7E-CC02-4922-A732-9A68408665FE}"/>
               </a:ext>
             </a:extLst>
           </p:cNvPr>
@@ -7282,7 +7282,7 @@
           <p:cNvPr id="5" name="">
             <a:extLst xmlns:a="http://schemas.openxmlformats.org/drawingml/2006/main">
               <a:ext uri="{FF2B5EF4-FFF2-40B4-BE49-F238E27FC236}">
-                <a16:creationId xmlns:a16="http://schemas.microsoft.com/office/drawing/2014/main" id="{86350FFB-6DCA-4CA4-B4EF-82C3C03C655E}"/>
+                <a16:creationId xmlns:a16="http://schemas.microsoft.com/office/drawing/2014/main" id="{BC4F2A84-27E9-4866-A914-7016140A9CDC}"/>
               </a:ext>
             </a:extLst>
           </p:cNvPr>
@@ -7339,7 +7339,7 @@
           <p:cNvPr id="6" name="">
             <a:extLst xmlns:a="http://schemas.openxmlformats.org/drawingml/2006/main">
               <a:ext uri="{FF2B5EF4-FFF2-40B4-BE49-F238E27FC236}">
-                <a16:creationId xmlns:a16="http://schemas.microsoft.com/office/drawing/2014/main" id="{518F6009-68C1-455B-B74A-1A79637B18A0}"/>
+                <a16:creationId xmlns:a16="http://schemas.microsoft.com/office/drawing/2014/main" id="{F4D1B03A-37A0-443A-B387-95D30D581115}"/>
               </a:ext>
             </a:extLst>
           </p:cNvPr>
@@ -7386,7 +7386,7 @@
                 <a:ea typeface="Heiti TC"/>
                 <a:cs typeface="Heiti TC"/>
               </a:rPr>
-              <a:t>今堂：輸入一張圖片，預測「筆／擦膠／空背景」</a:t>
+              <a:t>今堂：模型根據圖片，選擇一個類別</a:t>
             </a:r>
           </a:p>
         </p:txBody>
@@ -7396,7 +7396,7 @@
           <p:cNvPr id="7" name="">
             <a:extLst xmlns:a="http://schemas.openxmlformats.org/drawingml/2006/main">
               <a:ext uri="{FF2B5EF4-FFF2-40B4-BE49-F238E27FC236}">
-                <a16:creationId xmlns:a16="http://schemas.microsoft.com/office/drawing/2014/main" id="{93153F99-EBCA-4F24-A150-64BA37F7D52B}"/>
+                <a16:creationId xmlns:a16="http://schemas.microsoft.com/office/drawing/2014/main" id="{BAA98A43-4A8A-4E8A-ACCD-77699A749D6B}"/>
               </a:ext>
             </a:extLst>
           </p:cNvPr>
@@ -7443,7 +7443,7 @@
                 <a:ea typeface="Arial"/>
                 <a:cs typeface="Arial"/>
               </a:rPr>
-              <a:t>Today: an image predicts pen, eraser or empty background</a:t>
+              <a:t>Today: the model uses an image to choose a class</a:t>
             </a:r>
           </a:p>
         </p:txBody>
@@ -7453,7 +7453,7 @@
           <p:cNvPr id="8" name="">
             <a:extLst xmlns:a="http://schemas.openxmlformats.org/drawingml/2006/main">
               <a:ext uri="{FF2B5EF4-FFF2-40B4-BE49-F238E27FC236}">
-                <a16:creationId xmlns:a16="http://schemas.microsoft.com/office/drawing/2014/main" id="{D61043C2-4A8E-4429-88BA-A1F6E5657516}"/>
+                <a16:creationId xmlns:a16="http://schemas.microsoft.com/office/drawing/2014/main" id="{8AD38B23-881D-4AF0-A2D1-A7948C19579F}"/>
               </a:ext>
             </a:extLst>
           </p:cNvPr>
@@ -7510,7 +7510,7 @@
           <p:cNvPr id="9" name="">
             <a:extLst xmlns:a="http://schemas.openxmlformats.org/drawingml/2006/main">
               <a:ext uri="{FF2B5EF4-FFF2-40B4-BE49-F238E27FC236}">
-                <a16:creationId xmlns:a16="http://schemas.microsoft.com/office/drawing/2014/main" id="{30DEEDD5-44FF-43F1-AC7D-3626223EB674}"/>
+                <a16:creationId xmlns:a16="http://schemas.microsoft.com/office/drawing/2014/main" id="{C4D93522-7C90-40E9-BF80-785B77AA2A4F}"/>
               </a:ext>
             </a:extLst>
           </p:cNvPr>
@@ -7565,7 +7565,7 @@
     </p:spTree>
     <p:extLst>
       <p:ext uri="{BB962C8B-B14F-4D97-AF65-F5344CB8AC3E}">
-        <p14:creationId xmlns:p14="http://schemas.microsoft.com/office/powerpoint/2010/main" val="910559420"/>
+        <p14:creationId xmlns:p14="http://schemas.microsoft.com/office/powerpoint/2010/main" val="416741"/>
       </p:ext>
     </p:extLst>
   </p:cSld>
@@ -7596,7 +7596,7 @@
           <p:cNvPr id="10" name="">
             <a:extLst xmlns:a="http://schemas.openxmlformats.org/drawingml/2006/main">
               <a:ext uri="{FF2B5EF4-FFF2-40B4-BE49-F238E27FC236}">
-                <a16:creationId xmlns:a16="http://schemas.microsoft.com/office/drawing/2014/main" id="{393E7C17-FD2D-48EB-88F3-A232CB8320BD}"/>
+                <a16:creationId xmlns:a16="http://schemas.microsoft.com/office/drawing/2014/main" id="{3CE2B901-B1E5-43D5-BD95-62FF61DFDA16}"/>
               </a:ext>
             </a:extLst>
           </p:cNvPr>
@@ -7653,7 +7653,7 @@
           <p:cNvPr id="2" name="">
             <a:extLst xmlns:a="http://schemas.openxmlformats.org/drawingml/2006/main">
               <a:ext uri="{FF2B5EF4-FFF2-40B4-BE49-F238E27FC236}">
-                <a16:creationId xmlns:a16="http://schemas.microsoft.com/office/drawing/2014/main" id="{26E553B7-67F6-4DFB-A9FF-7A9586387317}"/>
+                <a16:creationId xmlns:a16="http://schemas.microsoft.com/office/drawing/2014/main" id="{907D01A9-BC91-40BB-BE6C-624C3CF4E7F8}"/>
               </a:ext>
             </a:extLst>
           </p:cNvPr>
@@ -7710,7 +7710,7 @@
           <p:cNvPr id="3" name="">
             <a:extLst xmlns:a="http://schemas.openxmlformats.org/drawingml/2006/main">
               <a:ext uri="{FF2B5EF4-FFF2-40B4-BE49-F238E27FC236}">
-                <a16:creationId xmlns:a16="http://schemas.microsoft.com/office/drawing/2014/main" id="{1B362C20-5AC7-4013-BCAA-26C4DD7C2DBD}"/>
+                <a16:creationId xmlns:a16="http://schemas.microsoft.com/office/drawing/2014/main" id="{7FE8BD90-C473-4DC7-9622-DB17B4FE04CA}"/>
               </a:ext>
             </a:extLst>
           </p:cNvPr>
@@ -7767,7 +7767,7 @@
           <p:cNvPr id="4" name="">
             <a:extLst xmlns:a="http://schemas.openxmlformats.org/drawingml/2006/main">
               <a:ext uri="{FF2B5EF4-FFF2-40B4-BE49-F238E27FC236}">
-                <a16:creationId xmlns:a16="http://schemas.microsoft.com/office/drawing/2014/main" id="{9C72B083-7BAD-4AF0-B4AD-9E2366188231}"/>
+                <a16:creationId xmlns:a16="http://schemas.microsoft.com/office/drawing/2014/main" id="{3F4EBE48-A93E-4AFA-8B47-90B0F80DA041}"/>
               </a:ext>
             </a:extLst>
           </p:cNvPr>
@@ -7824,7 +7824,7 @@
           <p:cNvPr id="5" name="">
             <a:extLst xmlns:a="http://schemas.openxmlformats.org/drawingml/2006/main">
               <a:ext uri="{FF2B5EF4-FFF2-40B4-BE49-F238E27FC236}">
-                <a16:creationId xmlns:a16="http://schemas.microsoft.com/office/drawing/2014/main" id="{C1FC0BE5-AF84-4AE8-8282-85E862776185}"/>
+                <a16:creationId xmlns:a16="http://schemas.microsoft.com/office/drawing/2014/main" id="{E89366E4-A8CF-478B-96B9-DB12F7E51215}"/>
               </a:ext>
             </a:extLst>
           </p:cNvPr>
@@ -7881,7 +7881,7 @@
           <p:cNvPr id="6" name="">
             <a:extLst xmlns:a="http://schemas.openxmlformats.org/drawingml/2006/main">
               <a:ext uri="{FF2B5EF4-FFF2-40B4-BE49-F238E27FC236}">
-                <a16:creationId xmlns:a16="http://schemas.microsoft.com/office/drawing/2014/main" id="{1B13DEA3-0D82-48D1-ACE3-260161ABBE10}"/>
+                <a16:creationId xmlns:a16="http://schemas.microsoft.com/office/drawing/2014/main" id="{D8461CE8-9FC4-456B-9231-94729FD17373}"/>
               </a:ext>
             </a:extLst>
           </p:cNvPr>
@@ -7938,7 +7938,7 @@
           <p:cNvPr id="7" name="">
             <a:extLst xmlns:a="http://schemas.openxmlformats.org/drawingml/2006/main">
               <a:ext uri="{FF2B5EF4-FFF2-40B4-BE49-F238E27FC236}">
-                <a16:creationId xmlns:a16="http://schemas.microsoft.com/office/drawing/2014/main" id="{84BE6B3F-65EF-4F8D-A181-F3F11EE86A0E}"/>
+                <a16:creationId xmlns:a16="http://schemas.microsoft.com/office/drawing/2014/main" id="{7578AADF-1849-4AF7-91CA-B22DB837416C}"/>
               </a:ext>
             </a:extLst>
           </p:cNvPr>
@@ -7995,7 +7995,7 @@
           <p:cNvPr id="8" name="">
             <a:extLst xmlns:a="http://schemas.openxmlformats.org/drawingml/2006/main">
               <a:ext uri="{FF2B5EF4-FFF2-40B4-BE49-F238E27FC236}">
-                <a16:creationId xmlns:a16="http://schemas.microsoft.com/office/drawing/2014/main" id="{3AC487BF-449F-4144-AA31-0FEB9E96235F}"/>
+                <a16:creationId xmlns:a16="http://schemas.microsoft.com/office/drawing/2014/main" id="{04BB1E06-0287-4C92-928E-7B5932522F2F}"/>
               </a:ext>
             </a:extLst>
           </p:cNvPr>
@@ -8052,7 +8052,7 @@
           <p:cNvPr id="9" name="">
             <a:extLst xmlns:a="http://schemas.openxmlformats.org/drawingml/2006/main">
               <a:ext uri="{FF2B5EF4-FFF2-40B4-BE49-F238E27FC236}">
-                <a16:creationId xmlns:a16="http://schemas.microsoft.com/office/drawing/2014/main" id="{369B8AB7-9E05-46E2-A11B-C95479728FD7}"/>
+                <a16:creationId xmlns:a16="http://schemas.microsoft.com/office/drawing/2014/main" id="{18A3FA0F-EC3C-440F-B56B-11888DFA033F}"/>
               </a:ext>
             </a:extLst>
           </p:cNvPr>
@@ -8107,7 +8107,7 @@
     </p:spTree>
     <p:extLst>
       <p:ext uri="{BB962C8B-B14F-4D97-AF65-F5344CB8AC3E}">
-        <p14:creationId xmlns:p14="http://schemas.microsoft.com/office/powerpoint/2010/main" val="913438482"/>
+        <p14:creationId xmlns:p14="http://schemas.microsoft.com/office/powerpoint/2010/main" val="492793463"/>
       </p:ext>
     </p:extLst>
   </p:cSld>
@@ -8138,7 +8138,7 @@
           <p:cNvPr id="10" name="">
             <a:extLst xmlns:a="http://schemas.openxmlformats.org/drawingml/2006/main">
               <a:ext uri="{FF2B5EF4-FFF2-40B4-BE49-F238E27FC236}">
-                <a16:creationId xmlns:a16="http://schemas.microsoft.com/office/drawing/2014/main" id="{78C4FC2F-8548-4DB6-A3DC-27E50EB83E44}"/>
+                <a16:creationId xmlns:a16="http://schemas.microsoft.com/office/drawing/2014/main" id="{579799C2-6F23-4C98-BED7-D19F9CBE69A2}"/>
               </a:ext>
             </a:extLst>
           </p:cNvPr>
@@ -8195,7 +8195,7 @@
           <p:cNvPr id="2" name="">
             <a:extLst xmlns:a="http://schemas.openxmlformats.org/drawingml/2006/main">
               <a:ext uri="{FF2B5EF4-FFF2-40B4-BE49-F238E27FC236}">
-                <a16:creationId xmlns:a16="http://schemas.microsoft.com/office/drawing/2014/main" id="{87320C91-ED52-4DBB-A9DA-C839525EC273}"/>
+                <a16:creationId xmlns:a16="http://schemas.microsoft.com/office/drawing/2014/main" id="{D564DB8F-49ED-496F-87EB-AAAD669E60CE}"/>
               </a:ext>
             </a:extLst>
           </p:cNvPr>
@@ -8252,7 +8252,7 @@
           <p:cNvPr id="3" name="">
             <a:extLst xmlns:a="http://schemas.openxmlformats.org/drawingml/2006/main">
               <a:ext uri="{FF2B5EF4-FFF2-40B4-BE49-F238E27FC236}">
-                <a16:creationId xmlns:a16="http://schemas.microsoft.com/office/drawing/2014/main" id="{31D83A8C-4C34-4466-80A4-68D599E61C51}"/>
+                <a16:creationId xmlns:a16="http://schemas.microsoft.com/office/drawing/2014/main" id="{B0298309-E5D2-48E7-9A5E-975C4EBBF11E}"/>
               </a:ext>
             </a:extLst>
           </p:cNvPr>
@@ -8309,7 +8309,7 @@
           <p:cNvPr id="4" name="">
             <a:extLst xmlns:a="http://schemas.openxmlformats.org/drawingml/2006/main">
               <a:ext uri="{FF2B5EF4-FFF2-40B4-BE49-F238E27FC236}">
-                <a16:creationId xmlns:a16="http://schemas.microsoft.com/office/drawing/2014/main" id="{22D97753-2E07-4454-9879-3AA8FF4D5022}"/>
+                <a16:creationId xmlns:a16="http://schemas.microsoft.com/office/drawing/2014/main" id="{53E894D0-6D7D-4D50-BC81-0AB9F39EC042}"/>
               </a:ext>
             </a:extLst>
           </p:cNvPr>
@@ -8366,7 +8366,7 @@
           <p:cNvPr id="5" name="">
             <a:extLst xmlns:a="http://schemas.openxmlformats.org/drawingml/2006/main">
               <a:ext uri="{FF2B5EF4-FFF2-40B4-BE49-F238E27FC236}">
-                <a16:creationId xmlns:a16="http://schemas.microsoft.com/office/drawing/2014/main" id="{7953B26A-40EA-4CD7-99FE-D8D8C868C369}"/>
+                <a16:creationId xmlns:a16="http://schemas.microsoft.com/office/drawing/2014/main" id="{A976D054-E3BD-4A79-8A65-8F9E14EE52D6}"/>
               </a:ext>
             </a:extLst>
           </p:cNvPr>
@@ -8423,7 +8423,7 @@
           <p:cNvPr id="6" name="">
             <a:extLst xmlns:a="http://schemas.openxmlformats.org/drawingml/2006/main">
               <a:ext uri="{FF2B5EF4-FFF2-40B4-BE49-F238E27FC236}">
-                <a16:creationId xmlns:a16="http://schemas.microsoft.com/office/drawing/2014/main" id="{C47A104A-70A7-4EF3-9291-80D447803231}"/>
+                <a16:creationId xmlns:a16="http://schemas.microsoft.com/office/drawing/2014/main" id="{630BCA55-1F3E-4FDE-98FA-1DD8FADA31A2}"/>
               </a:ext>
             </a:extLst>
           </p:cNvPr>
@@ -8480,7 +8480,7 @@
           <p:cNvPr id="7" name="">
             <a:extLst xmlns:a="http://schemas.openxmlformats.org/drawingml/2006/main">
               <a:ext uri="{FF2B5EF4-FFF2-40B4-BE49-F238E27FC236}">
-                <a16:creationId xmlns:a16="http://schemas.microsoft.com/office/drawing/2014/main" id="{3E5CD8A9-0978-485B-B9DA-6DF9AB21C91A}"/>
+                <a16:creationId xmlns:a16="http://schemas.microsoft.com/office/drawing/2014/main" id="{25F6D81D-8B0B-4F37-8834-A0D79E2F7DA0}"/>
               </a:ext>
             </a:extLst>
           </p:cNvPr>
@@ -8537,7 +8537,7 @@
           <p:cNvPr id="8" name="">
             <a:extLst xmlns:a="http://schemas.openxmlformats.org/drawingml/2006/main">
               <a:ext uri="{FF2B5EF4-FFF2-40B4-BE49-F238E27FC236}">
-                <a16:creationId xmlns:a16="http://schemas.microsoft.com/office/drawing/2014/main" id="{FC78F648-BD03-49D6-B211-7700D7EFDA75}"/>
+                <a16:creationId xmlns:a16="http://schemas.microsoft.com/office/drawing/2014/main" id="{A6138480-64CF-403A-B957-F0C9D91DC77D}"/>
               </a:ext>
             </a:extLst>
           </p:cNvPr>
@@ -8594,7 +8594,7 @@
           <p:cNvPr id="9" name="">
             <a:extLst xmlns:a="http://schemas.openxmlformats.org/drawingml/2006/main">
               <a:ext uri="{FF2B5EF4-FFF2-40B4-BE49-F238E27FC236}">
-                <a16:creationId xmlns:a16="http://schemas.microsoft.com/office/drawing/2014/main" id="{7E58CD4B-CE01-47EB-A3F6-E89C6398DA51}"/>
+                <a16:creationId xmlns:a16="http://schemas.microsoft.com/office/drawing/2014/main" id="{AACF7D57-DF34-4646-ACEE-F7095CF8F2C8}"/>
               </a:ext>
             </a:extLst>
           </p:cNvPr>
@@ -8649,7 +8649,7 @@
     </p:spTree>
     <p:extLst>
       <p:ext uri="{BB962C8B-B14F-4D97-AF65-F5344CB8AC3E}">
-        <p14:creationId xmlns:p14="http://schemas.microsoft.com/office/powerpoint/2010/main" val="2056014836"/>
+        <p14:creationId xmlns:p14="http://schemas.microsoft.com/office/powerpoint/2010/main" val="326191900"/>
       </p:ext>
     </p:extLst>
   </p:cSld>
@@ -8680,7 +8680,7 @@
           <p:cNvPr id="10" name="">
             <a:extLst xmlns:a="http://schemas.openxmlformats.org/drawingml/2006/main">
               <a:ext uri="{FF2B5EF4-FFF2-40B4-BE49-F238E27FC236}">
-                <a16:creationId xmlns:a16="http://schemas.microsoft.com/office/drawing/2014/main" id="{1ECF44B1-B3D6-417C-AD81-2CAF3351F4F4}"/>
+                <a16:creationId xmlns:a16="http://schemas.microsoft.com/office/drawing/2014/main" id="{9E98CEA1-BD4D-4DEC-B662-4AF0F5678D4A}"/>
               </a:ext>
             </a:extLst>
           </p:cNvPr>
@@ -8737,7 +8737,7 @@
           <p:cNvPr id="2" name="">
             <a:extLst xmlns:a="http://schemas.openxmlformats.org/drawingml/2006/main">
               <a:ext uri="{FF2B5EF4-FFF2-40B4-BE49-F238E27FC236}">
-                <a16:creationId xmlns:a16="http://schemas.microsoft.com/office/drawing/2014/main" id="{3471A0EE-5F69-4DB8-B9AC-CED317226464}"/>
+                <a16:creationId xmlns:a16="http://schemas.microsoft.com/office/drawing/2014/main" id="{18F034D0-51BD-4240-8830-05342255F8DF}"/>
               </a:ext>
             </a:extLst>
           </p:cNvPr>
@@ -8794,7 +8794,7 @@
           <p:cNvPr id="3" name="">
             <a:extLst xmlns:a="http://schemas.openxmlformats.org/drawingml/2006/main">
               <a:ext uri="{FF2B5EF4-FFF2-40B4-BE49-F238E27FC236}">
-                <a16:creationId xmlns:a16="http://schemas.microsoft.com/office/drawing/2014/main" id="{C6EB5F00-E227-4B80-837F-8FA33DCC56FD}"/>
+                <a16:creationId xmlns:a16="http://schemas.microsoft.com/office/drawing/2014/main" id="{75988A60-78DD-4F8C-B076-D839F653179B}"/>
               </a:ext>
             </a:extLst>
           </p:cNvPr>
@@ -8851,7 +8851,7 @@
           <p:cNvPr id="4" name="">
             <a:extLst xmlns:a="http://schemas.openxmlformats.org/drawingml/2006/main">
               <a:ext uri="{FF2B5EF4-FFF2-40B4-BE49-F238E27FC236}">
-                <a16:creationId xmlns:a16="http://schemas.microsoft.com/office/drawing/2014/main" id="{824ADF79-C188-4A20-90E9-9B9CC93CF3BA}"/>
+                <a16:creationId xmlns:a16="http://schemas.microsoft.com/office/drawing/2014/main" id="{DC59B185-B266-42C6-8108-BBC392456CAE}"/>
               </a:ext>
             </a:extLst>
           </p:cNvPr>
@@ -8908,7 +8908,7 @@
           <p:cNvPr id="5" name="">
             <a:extLst xmlns:a="http://schemas.openxmlformats.org/drawingml/2006/main">
               <a:ext uri="{FF2B5EF4-FFF2-40B4-BE49-F238E27FC236}">
-                <a16:creationId xmlns:a16="http://schemas.microsoft.com/office/drawing/2014/main" id="{9F9C2248-B4AF-4003-8958-6E2E8CEDAC6A}"/>
+                <a16:creationId xmlns:a16="http://schemas.microsoft.com/office/drawing/2014/main" id="{EFC5BADA-5261-4929-A746-99A0EE45654F}"/>
               </a:ext>
             </a:extLst>
           </p:cNvPr>
@@ -8965,7 +8965,7 @@
           <p:cNvPr id="6" name="">
             <a:extLst xmlns:a="http://schemas.openxmlformats.org/drawingml/2006/main">
               <a:ext uri="{FF2B5EF4-FFF2-40B4-BE49-F238E27FC236}">
-                <a16:creationId xmlns:a16="http://schemas.microsoft.com/office/drawing/2014/main" id="{CD660D3D-F41C-4781-AE67-698274640C51}"/>
+                <a16:creationId xmlns:a16="http://schemas.microsoft.com/office/drawing/2014/main" id="{79B77CAA-3CEC-4A17-9F1B-39B2F805597C}"/>
               </a:ext>
             </a:extLst>
           </p:cNvPr>
@@ -9012,7 +9012,7 @@
                 <a:ea typeface="Heiti TC"/>
                 <a:cs typeface="Heiti TC"/>
               </a:rPr>
-              <a:t>再用我們的相片，建立自己的分類部分</a:t>
+              <a:t>用我們的相片，教它分辨今天的三類</a:t>
             </a:r>
           </a:p>
         </p:txBody>
@@ -9022,7 +9022,7 @@
           <p:cNvPr id="7" name="">
             <a:extLst xmlns:a="http://schemas.openxmlformats.org/drawingml/2006/main">
               <a:ext uri="{FF2B5EF4-FFF2-40B4-BE49-F238E27FC236}">
-                <a16:creationId xmlns:a16="http://schemas.microsoft.com/office/drawing/2014/main" id="{2661C9D7-585D-44EA-9D95-C214D0D97659}"/>
+                <a16:creationId xmlns:a16="http://schemas.microsoft.com/office/drawing/2014/main" id="{E5FC8FBD-1A9D-409B-9EA5-5E342ED33AD6}"/>
               </a:ext>
             </a:extLst>
           </p:cNvPr>
@@ -9069,7 +9069,7 @@
                 <a:ea typeface="Arial"/>
                 <a:cs typeface="Arial"/>
               </a:rPr>
-              <a:t>Our images teach the classifier our chosen classes</a:t>
+              <a:t>Use our photos to teach it today’s three classes</a:t>
             </a:r>
           </a:p>
         </p:txBody>
@@ -9079,7 +9079,7 @@
           <p:cNvPr id="8" name="">
             <a:extLst xmlns:a="http://schemas.openxmlformats.org/drawingml/2006/main">
               <a:ext uri="{FF2B5EF4-FFF2-40B4-BE49-F238E27FC236}">
-                <a16:creationId xmlns:a16="http://schemas.microsoft.com/office/drawing/2014/main" id="{392BABB5-83A9-4F4A-A041-E3D3FD985262}"/>
+                <a16:creationId xmlns:a16="http://schemas.microsoft.com/office/drawing/2014/main" id="{51DF6864-EEF0-465D-9B5B-E66F235530F0}"/>
               </a:ext>
             </a:extLst>
           </p:cNvPr>
@@ -9136,7 +9136,7 @@
           <p:cNvPr id="9" name="">
             <a:extLst xmlns:a="http://schemas.openxmlformats.org/drawingml/2006/main">
               <a:ext uri="{FF2B5EF4-FFF2-40B4-BE49-F238E27FC236}">
-                <a16:creationId xmlns:a16="http://schemas.microsoft.com/office/drawing/2014/main" id="{1719875A-2CB8-4B9B-BF01-39814DA2044F}"/>
+                <a16:creationId xmlns:a16="http://schemas.microsoft.com/office/drawing/2014/main" id="{0619B9B6-2632-479B-BC3E-A746560B86F1}"/>
               </a:ext>
             </a:extLst>
           </p:cNvPr>
@@ -9191,7 +9191,7 @@
     </p:spTree>
     <p:extLst>
       <p:ext uri="{BB962C8B-B14F-4D97-AF65-F5344CB8AC3E}">
-        <p14:creationId xmlns:p14="http://schemas.microsoft.com/office/powerpoint/2010/main" val="1296098562"/>
+        <p14:creationId xmlns:p14="http://schemas.microsoft.com/office/powerpoint/2010/main" val="659107410"/>
       </p:ext>
     </p:extLst>
   </p:cSld>
@@ -9222,7 +9222,7 @@
           <p:cNvPr id="12" name="">
             <a:extLst xmlns:a="http://schemas.openxmlformats.org/drawingml/2006/main">
               <a:ext uri="{FF2B5EF4-FFF2-40B4-BE49-F238E27FC236}">
-                <a16:creationId xmlns:a16="http://schemas.microsoft.com/office/drawing/2014/main" id="{CD81BD2E-1F8A-4DB3-B0D4-0131A321355D}"/>
+                <a16:creationId xmlns:a16="http://schemas.microsoft.com/office/drawing/2014/main" id="{310E488D-DB95-4416-9729-655F01FF4726}"/>
               </a:ext>
             </a:extLst>
           </p:cNvPr>
@@ -9279,7 +9279,7 @@
           <p:cNvPr id="2" name="">
             <a:extLst xmlns:a="http://schemas.openxmlformats.org/drawingml/2006/main">
               <a:ext uri="{FF2B5EF4-FFF2-40B4-BE49-F238E27FC236}">
-                <a16:creationId xmlns:a16="http://schemas.microsoft.com/office/drawing/2014/main" id="{E527BDE4-025C-48AA-93C6-327006FB5826}"/>
+                <a16:creationId xmlns:a16="http://schemas.microsoft.com/office/drawing/2014/main" id="{77E5BAB7-DEC2-4A9A-81F5-8CFB97C3CB9E}"/>
               </a:ext>
             </a:extLst>
           </p:cNvPr>
@@ -9336,7 +9336,7 @@
           <p:cNvPr id="3" name="">
             <a:extLst xmlns:a="http://schemas.openxmlformats.org/drawingml/2006/main">
               <a:ext uri="{FF2B5EF4-FFF2-40B4-BE49-F238E27FC236}">
-                <a16:creationId xmlns:a16="http://schemas.microsoft.com/office/drawing/2014/main" id="{00325675-79B5-430D-9949-FDAEC20D436E}"/>
+                <a16:creationId xmlns:a16="http://schemas.microsoft.com/office/drawing/2014/main" id="{F961C3F8-344E-4461-B877-70407C75069F}"/>
               </a:ext>
             </a:extLst>
           </p:cNvPr>
@@ -9397,7 +9397,7 @@
           <p:nvPr/>
         </p:nvPicPr>
         <p:blipFill>
-          <a:blip xmlns:r="http://schemas.openxmlformats.org/officeDocument/2006/relationships" xmlns:a="http://schemas.openxmlformats.org/drawingml/2006/main" r:embed="R0f7731e05c5542ee"/>
+          <a:blip xmlns:r="http://schemas.openxmlformats.org/officeDocument/2006/relationships" xmlns:a="http://schemas.openxmlformats.org/drawingml/2006/main" r:embed="Recb6d0c3c1fa42c0"/>
           <a:stretch xmlns:a="http://schemas.openxmlformats.org/drawingml/2006/main"/>
         </p:blipFill>
         <p:spPr>
@@ -9415,7 +9415,7 @@
           <p:cNvPr id="5" name="">
             <a:extLst xmlns:a="http://schemas.openxmlformats.org/drawingml/2006/main">
               <a:ext uri="{FF2B5EF4-FFF2-40B4-BE49-F238E27FC236}">
-                <a16:creationId xmlns:a16="http://schemas.microsoft.com/office/drawing/2014/main" id="{19D2B711-9654-4A5A-9B64-A01AE71AD899}"/>
+                <a16:creationId xmlns:a16="http://schemas.microsoft.com/office/drawing/2014/main" id="{DCA1B79F-1815-4B1B-944F-DA975284866B}"/>
               </a:ext>
             </a:extLst>
           </p:cNvPr>
@@ -9472,7 +9472,7 @@
           <p:cNvPr id="6" name="">
             <a:extLst xmlns:a="http://schemas.openxmlformats.org/drawingml/2006/main">
               <a:ext uri="{FF2B5EF4-FFF2-40B4-BE49-F238E27FC236}">
-                <a16:creationId xmlns:a16="http://schemas.microsoft.com/office/drawing/2014/main" id="{90108515-0487-4259-B6D1-CBCF1867DDA7}"/>
+                <a16:creationId xmlns:a16="http://schemas.microsoft.com/office/drawing/2014/main" id="{DF9E5D16-B0E4-4C69-A37C-B6C4EB1B2762}"/>
               </a:ext>
             </a:extLst>
           </p:cNvPr>
@@ -9529,7 +9529,7 @@
           <p:cNvPr id="7" name="">
             <a:extLst xmlns:a="http://schemas.openxmlformats.org/drawingml/2006/main">
               <a:ext uri="{FF2B5EF4-FFF2-40B4-BE49-F238E27FC236}">
-                <a16:creationId xmlns:a16="http://schemas.microsoft.com/office/drawing/2014/main" id="{EB305EA6-7CDB-42E0-858B-E81A16C65A2D}"/>
+                <a16:creationId xmlns:a16="http://schemas.microsoft.com/office/drawing/2014/main" id="{0079FFAF-072D-44D6-85F9-41CD781E4A97}"/>
               </a:ext>
             </a:extLst>
           </p:cNvPr>
@@ -9586,7 +9586,7 @@
           <p:cNvPr id="8" name="">
             <a:extLst xmlns:a="http://schemas.openxmlformats.org/drawingml/2006/main">
               <a:ext uri="{FF2B5EF4-FFF2-40B4-BE49-F238E27FC236}">
-                <a16:creationId xmlns:a16="http://schemas.microsoft.com/office/drawing/2014/main" id="{EB5C613A-1230-4317-8BA1-EEDA0A78B9DA}"/>
+                <a16:creationId xmlns:a16="http://schemas.microsoft.com/office/drawing/2014/main" id="{A801136A-866D-4629-9A6A-7FEC20F90475}"/>
               </a:ext>
             </a:extLst>
           </p:cNvPr>
@@ -9643,7 +9643,7 @@
           <p:cNvPr id="9" name="">
             <a:extLst xmlns:a="http://schemas.openxmlformats.org/drawingml/2006/main">
               <a:ext uri="{FF2B5EF4-FFF2-40B4-BE49-F238E27FC236}">
-                <a16:creationId xmlns:a16="http://schemas.microsoft.com/office/drawing/2014/main" id="{2F8C7680-910C-4154-83EC-B74C1CDF7C4F}"/>
+                <a16:creationId xmlns:a16="http://schemas.microsoft.com/office/drawing/2014/main" id="{3CAA794D-2CCC-4187-B5B3-5AD13D4B68E7}"/>
               </a:ext>
             </a:extLst>
           </p:cNvPr>
@@ -9700,7 +9700,7 @@
           <p:cNvPr id="10" name="">
             <a:extLst xmlns:a="http://schemas.openxmlformats.org/drawingml/2006/main">
               <a:ext uri="{FF2B5EF4-FFF2-40B4-BE49-F238E27FC236}">
-                <a16:creationId xmlns:a16="http://schemas.microsoft.com/office/drawing/2014/main" id="{4BDE7037-8652-4CFB-9468-07051D8D512E}"/>
+                <a16:creationId xmlns:a16="http://schemas.microsoft.com/office/drawing/2014/main" id="{10C59466-D505-4582-916E-3000B3B912D8}"/>
               </a:ext>
             </a:extLst>
           </p:cNvPr>
@@ -9757,7 +9757,7 @@
           <p:cNvPr id="11" name="">
             <a:extLst xmlns:a="http://schemas.openxmlformats.org/drawingml/2006/main">
               <a:ext uri="{FF2B5EF4-FFF2-40B4-BE49-F238E27FC236}">
-                <a16:creationId xmlns:a16="http://schemas.microsoft.com/office/drawing/2014/main" id="{C39A7ABA-B1B8-4305-BE12-6C5C0C93261A}"/>
+                <a16:creationId xmlns:a16="http://schemas.microsoft.com/office/drawing/2014/main" id="{8C374E47-68E2-4766-A973-D0DC75AA0DA0}"/>
               </a:ext>
             </a:extLst>
           </p:cNvPr>
@@ -9812,7 +9812,7 @@
     </p:spTree>
     <p:extLst>
       <p:ext uri="{BB962C8B-B14F-4D97-AF65-F5344CB8AC3E}">
-        <p14:creationId xmlns:p14="http://schemas.microsoft.com/office/powerpoint/2010/main" val="1649623722"/>
+        <p14:creationId xmlns:p14="http://schemas.microsoft.com/office/powerpoint/2010/main" val="359010370"/>
       </p:ext>
     </p:extLst>
   </p:cSld>
@@ -9843,7 +9843,7 @@
           <p:cNvPr id="10" name="">
             <a:extLst xmlns:a="http://schemas.openxmlformats.org/drawingml/2006/main">
               <a:ext uri="{FF2B5EF4-FFF2-40B4-BE49-F238E27FC236}">
-                <a16:creationId xmlns:a16="http://schemas.microsoft.com/office/drawing/2014/main" id="{C8C8ADFD-F3EF-4FAB-89A1-60E678B5DA6F}"/>
+                <a16:creationId xmlns:a16="http://schemas.microsoft.com/office/drawing/2014/main" id="{C381065E-73A1-4E3E-B27B-49145EABACBB}"/>
               </a:ext>
             </a:extLst>
           </p:cNvPr>
@@ -9900,7 +9900,7 @@
           <p:cNvPr id="2" name="">
             <a:extLst xmlns:a="http://schemas.openxmlformats.org/drawingml/2006/main">
               <a:ext uri="{FF2B5EF4-FFF2-40B4-BE49-F238E27FC236}">
-                <a16:creationId xmlns:a16="http://schemas.microsoft.com/office/drawing/2014/main" id="{C68E9BD4-0C34-4B70-AD53-76E4F7073082}"/>
+                <a16:creationId xmlns:a16="http://schemas.microsoft.com/office/drawing/2014/main" id="{1C4CEAC2-6CE8-40A3-9792-673005B89011}"/>
               </a:ext>
             </a:extLst>
           </p:cNvPr>
@@ -9957,7 +9957,7 @@
           <p:cNvPr id="3" name="">
             <a:extLst xmlns:a="http://schemas.openxmlformats.org/drawingml/2006/main">
               <a:ext uri="{FF2B5EF4-FFF2-40B4-BE49-F238E27FC236}">
-                <a16:creationId xmlns:a16="http://schemas.microsoft.com/office/drawing/2014/main" id="{28E9E553-8F65-4CCF-91C1-F6E56989B919}"/>
+                <a16:creationId xmlns:a16="http://schemas.microsoft.com/office/drawing/2014/main" id="{22F5A5AA-FAD1-4981-905C-33BE22327EC8}"/>
               </a:ext>
             </a:extLst>
           </p:cNvPr>
@@ -10014,7 +10014,7 @@
           <p:cNvPr id="4" name="">
             <a:extLst xmlns:a="http://schemas.openxmlformats.org/drawingml/2006/main">
               <a:ext uri="{FF2B5EF4-FFF2-40B4-BE49-F238E27FC236}">
-                <a16:creationId xmlns:a16="http://schemas.microsoft.com/office/drawing/2014/main" id="{9D3BDB95-93DA-4075-B434-4F608C36A483}"/>
+                <a16:creationId xmlns:a16="http://schemas.microsoft.com/office/drawing/2014/main" id="{23161603-5025-4FE7-9892-E0ED45198875}"/>
               </a:ext>
             </a:extLst>
           </p:cNvPr>
@@ -10071,7 +10071,7 @@
           <p:cNvPr id="5" name="">
             <a:extLst xmlns:a="http://schemas.openxmlformats.org/drawingml/2006/main">
               <a:ext uri="{FF2B5EF4-FFF2-40B4-BE49-F238E27FC236}">
-                <a16:creationId xmlns:a16="http://schemas.microsoft.com/office/drawing/2014/main" id="{85BE981E-D2D8-432E-B700-517C53E1A3EC}"/>
+                <a16:creationId xmlns:a16="http://schemas.microsoft.com/office/drawing/2014/main" id="{BD3DABCC-31CF-4179-8D1D-C7040A9C0850}"/>
               </a:ext>
             </a:extLst>
           </p:cNvPr>
@@ -10128,7 +10128,7 @@
           <p:cNvPr id="6" name="">
             <a:extLst xmlns:a="http://schemas.openxmlformats.org/drawingml/2006/main">
               <a:ext uri="{FF2B5EF4-FFF2-40B4-BE49-F238E27FC236}">
-                <a16:creationId xmlns:a16="http://schemas.microsoft.com/office/drawing/2014/main" id="{1BACF9C9-2DF2-4031-B866-EB3EE3A5096B}"/>
+                <a16:creationId xmlns:a16="http://schemas.microsoft.com/office/drawing/2014/main" id="{1641428D-8A61-4BAF-81C5-A3E96C579612}"/>
               </a:ext>
             </a:extLst>
           </p:cNvPr>
@@ -10185,7 +10185,7 @@
           <p:cNvPr id="7" name="">
             <a:extLst xmlns:a="http://schemas.openxmlformats.org/drawingml/2006/main">
               <a:ext uri="{FF2B5EF4-FFF2-40B4-BE49-F238E27FC236}">
-                <a16:creationId xmlns:a16="http://schemas.microsoft.com/office/drawing/2014/main" id="{88193E70-83FF-4870-9E32-1413581E1BFB}"/>
+                <a16:creationId xmlns:a16="http://schemas.microsoft.com/office/drawing/2014/main" id="{5536B47D-3B6B-427E-8C84-2FAABEDE5252}"/>
               </a:ext>
             </a:extLst>
           </p:cNvPr>
@@ -10242,7 +10242,7 @@
           <p:cNvPr id="8" name="">
             <a:extLst xmlns:a="http://schemas.openxmlformats.org/drawingml/2006/main">
               <a:ext uri="{FF2B5EF4-FFF2-40B4-BE49-F238E27FC236}">
-                <a16:creationId xmlns:a16="http://schemas.microsoft.com/office/drawing/2014/main" id="{8609F00B-2BC7-48E0-94DB-9720901FEB68}"/>
+                <a16:creationId xmlns:a16="http://schemas.microsoft.com/office/drawing/2014/main" id="{79146639-0642-482B-9CA5-5CFB0ED5B868}"/>
               </a:ext>
             </a:extLst>
           </p:cNvPr>
@@ -10299,7 +10299,7 @@
           <p:cNvPr id="9" name="">
             <a:extLst xmlns:a="http://schemas.openxmlformats.org/drawingml/2006/main">
               <a:ext uri="{FF2B5EF4-FFF2-40B4-BE49-F238E27FC236}">
-                <a16:creationId xmlns:a16="http://schemas.microsoft.com/office/drawing/2014/main" id="{79EB012A-0FE9-4373-91A3-ABAFB177AA15}"/>
+                <a16:creationId xmlns:a16="http://schemas.microsoft.com/office/drawing/2014/main" id="{A3DB7278-776D-4326-BF04-47F2F84E0F88}"/>
               </a:ext>
             </a:extLst>
           </p:cNvPr>
@@ -10354,7 +10354,7 @@
     </p:spTree>
     <p:extLst>
       <p:ext uri="{BB962C8B-B14F-4D97-AF65-F5344CB8AC3E}">
-        <p14:creationId xmlns:p14="http://schemas.microsoft.com/office/powerpoint/2010/main" val="783777282"/>
+        <p14:creationId xmlns:p14="http://schemas.microsoft.com/office/powerpoint/2010/main" val="2046011030"/>
       </p:ext>
     </p:extLst>
   </p:cSld>
